--- a/ppt/AML-System-Walkthrough-Legal-EN -0604-v2.pptx
+++ b/ppt/AML-System-Walkthrough-Legal-EN -0604-v2.pptx
@@ -16,6 +16,7 @@
     <p:sldId id="260" r:id="rId6"/>
     <p:sldId id="261" r:id="rId7"/>
     <p:sldId id="263" r:id="rId8"/>
+    <p:sldId id="266" r:id="rId16"/>
     <p:sldId id="264" r:id="rId9"/>
   </p:sldIdLst>
   <p:sldSz cx="12192000" cy="6858000"/>
@@ -1550,7 +1551,2181 @@
 </p:sld>
 </file>
 
+<file path=ppt/slides/slide10.xml><?xml version="1.0" encoding="utf-8"?>
+<p:sld xmlns:a="http://schemas.openxmlformats.org/drawingml/2006/main" xmlns:p="http://schemas.openxmlformats.org/presentationml/2006/main" xmlns:r="http://schemas.openxmlformats.org/officeDocument/2006/relationships">
+  <p:cSld>
+    <p:bg>
+      <p:bgPr>
+        <a:solidFill>
+          <a:srgbClr val="FFFFFF"/>
+        </a:solidFill>
+        <a:effectLst/>
+      </p:bgPr>
+    </p:bg>
+    <p:spTree>
+      <p:nvGrpSpPr>
+        <p:cNvPr id="1" name=""/>
+        <p:cNvGrpSpPr/>
+        <p:nvPr/>
+      </p:nvGrpSpPr>
+      <p:grpSpPr/>
+      <p:sp>
+        <p:nvSpPr>
+          <p:cNvPr id="2" name="Rectangle 1"/>
+          <p:cNvSpPr/>
+          <p:nvPr/>
+        </p:nvSpPr>
+        <p:spPr>
+          <a:xfrm>
+            <a:off x="0" y="0"/>
+            <a:ext cx="256032" cy="6858000"/>
+          </a:xfrm>
+          <a:prstGeom prst="rect">
+            <a:avLst/>
+          </a:prstGeom>
+          <a:solidFill>
+            <a:srgbClr val="1BA39C"/>
+          </a:solidFill>
+          <a:ln>
+            <a:noFill/>
+          </a:ln>
+          <a:effectLst/>
+        </p:spPr>
+        <p:style>
+          <a:lnRef idx="1">
+            <a:schemeClr val="accent1"/>
+          </a:lnRef>
+          <a:fillRef idx="3">
+            <a:schemeClr val="accent1"/>
+          </a:fillRef>
+          <a:effectRef idx="2">
+            <a:schemeClr val="accent1"/>
+          </a:effectRef>
+          <a:fontRef idx="minor">
+            <a:schemeClr val="lt1"/>
+          </a:fontRef>
+        </p:style>
+        <p:txBody>
+          <a:bodyPr rtlCol="0" anchor="ctr"/>
+          <a:lstStyle/>
+          <a:p>
+            <a:pPr algn="ctr"/>
+          </a:p>
+        </p:txBody>
+      </p:sp>
+      <p:sp>
+        <p:nvSpPr>
+          <p:cNvPr id="3" name="TextBox 2"/>
+          <p:cNvSpPr txBox="1"/>
+          <p:nvPr/>
+        </p:nvSpPr>
+        <p:spPr>
+          <a:xfrm>
+            <a:off x="548640" y="457200"/>
+            <a:ext cx="9144000" cy="274320"/>
+          </a:xfrm>
+          <a:prstGeom prst="rect">
+            <a:avLst/>
+          </a:prstGeom>
+          <a:noFill/>
+        </p:spPr>
+        <p:txBody>
+          <a:bodyPr wrap="square" anchor="t" lIns="36576" rIns="36576" tIns="18288" bIns="18288">
+            <a:spAutoFit/>
+          </a:bodyPr>
+          <a:lstStyle/>
+          <a:p>
+            <a:pPr algn="l">
+              <a:lnSpc>
+                <a:spcPct val="105000"/>
+              </a:lnSpc>
+            </a:pPr>
+            <a:r>
+              <a:rPr sz="1200" b="1">
+                <a:solidFill>
+                  <a:srgbClr val="1BA39C"/>
+                </a:solidFill>
+                <a:latin typeface="Calibri"/>
+              </a:rPr>
+              <a:t>EVOLUTION</a:t>
+            </a:r>
+          </a:p>
+        </p:txBody>
+      </p:sp>
+      <p:sp>
+        <p:nvSpPr>
+          <p:cNvPr id="4" name="TextBox 3"/>
+          <p:cNvSpPr txBox="1"/>
+          <p:nvPr/>
+        </p:nvSpPr>
+        <p:spPr>
+          <a:xfrm>
+            <a:off x="548640" y="749808"/>
+            <a:ext cx="11064240" cy="822960"/>
+          </a:xfrm>
+          <a:prstGeom prst="rect">
+            <a:avLst/>
+          </a:prstGeom>
+          <a:noFill/>
+        </p:spPr>
+        <p:txBody>
+          <a:bodyPr wrap="square" anchor="t" lIns="36576" rIns="36576" tIns="18288" bIns="18288">
+            <a:spAutoFit/>
+          </a:bodyPr>
+          <a:lstStyle/>
+          <a:p>
+            <a:pPr algn="l">
+              <a:lnSpc>
+                <a:spcPct val="105000"/>
+              </a:lnSpc>
+            </a:pPr>
+            <a:r>
+              <a:rPr sz="3000" b="1">
+                <a:solidFill>
+                  <a:srgbClr val="17313F"/>
+                </a:solidFill>
+                <a:latin typeface="Calibri"/>
+              </a:rPr>
+              <a:t>Two evolution engines</a:t>
+            </a:r>
+          </a:p>
+        </p:txBody>
+      </p:sp>
+      <p:sp>
+        <p:nvSpPr>
+          <p:cNvPr id="5" name="TextBox 4"/>
+          <p:cNvSpPr txBox="1"/>
+          <p:nvPr/>
+        </p:nvSpPr>
+        <p:spPr>
+          <a:xfrm>
+            <a:off x="566928" y="1600200"/>
+            <a:ext cx="10972800" cy="457200"/>
+          </a:xfrm>
+          <a:prstGeom prst="rect">
+            <a:avLst/>
+          </a:prstGeom>
+          <a:noFill/>
+        </p:spPr>
+        <p:txBody>
+          <a:bodyPr wrap="square" anchor="t" lIns="36576" rIns="36576" tIns="18288" bIns="18288">
+            <a:spAutoFit/>
+          </a:bodyPr>
+          <a:lstStyle/>
+          <a:p>
+            <a:pPr algn="l">
+              <a:lnSpc>
+                <a:spcPct val="115000"/>
+              </a:lnSpc>
+            </a:pPr>
+            <a:r>
+              <a:rPr sz="1400" b="0">
+                <a:solidFill>
+                  <a:srgbClr val="71838F"/>
+                </a:solidFill>
+                <a:latin typeface="Calibri"/>
+              </a:rPr>
+              <a:t>The system evolves in two directions — both behind an auditable gate.</a:t>
+            </a:r>
+          </a:p>
+        </p:txBody>
+      </p:sp>
+      <p:sp>
+        <p:nvSpPr>
+          <p:cNvPr id="6" name="TextBox 5"/>
+          <p:cNvSpPr txBox="1"/>
+          <p:nvPr/>
+        </p:nvSpPr>
+        <p:spPr>
+          <a:xfrm>
+            <a:off x="640080" y="2148840"/>
+            <a:ext cx="10058400" cy="292608"/>
+          </a:xfrm>
+          <a:prstGeom prst="rect">
+            <a:avLst/>
+          </a:prstGeom>
+          <a:noFill/>
+        </p:spPr>
+        <p:txBody>
+          <a:bodyPr wrap="square" anchor="t" lIns="36576" rIns="36576" tIns="18288" bIns="18288">
+            <a:spAutoFit/>
+          </a:bodyPr>
+          <a:lstStyle/>
+          <a:p>
+            <a:pPr algn="l">
+              <a:lnSpc>
+                <a:spcPct val="105000"/>
+              </a:lnSpc>
+            </a:pPr>
+            <a:r>
+              <a:rPr sz="1300" b="1">
+                <a:solidFill>
+                  <a:srgbClr val="1BA39C"/>
+                </a:solidFill>
+                <a:latin typeface="Calibri"/>
+              </a:rPr>
+              <a:t>Loop A · Investigations get more accurate &amp; complete</a:t>
+            </a:r>
+          </a:p>
+        </p:txBody>
+      </p:sp>
+      <p:sp>
+        <p:nvSpPr>
+          <p:cNvPr id="7" name="Rounded Rectangle 6"/>
+          <p:cNvSpPr/>
+          <p:nvPr/>
+        </p:nvSpPr>
+        <p:spPr>
+          <a:xfrm>
+            <a:off x="640080" y="2487168"/>
+            <a:ext cx="3291840" cy="822960"/>
+          </a:xfrm>
+          <a:prstGeom prst="roundRect">
+            <a:avLst>
+              <a:gd name="adj" fmla="val 12000"/>
+            </a:avLst>
+          </a:prstGeom>
+          <a:solidFill>
+            <a:srgbClr val="F4FAFB"/>
+          </a:solidFill>
+          <a:ln w="12700">
+            <a:solidFill>
+              <a:srgbClr val="DCE8EE"/>
+            </a:solidFill>
+          </a:ln>
+          <a:effectLst/>
+        </p:spPr>
+        <p:style>
+          <a:lnRef idx="1">
+            <a:schemeClr val="accent1"/>
+          </a:lnRef>
+          <a:fillRef idx="3">
+            <a:schemeClr val="accent1"/>
+          </a:fillRef>
+          <a:effectRef idx="2">
+            <a:schemeClr val="accent1"/>
+          </a:effectRef>
+          <a:fontRef idx="minor">
+            <a:schemeClr val="lt1"/>
+          </a:fontRef>
+        </p:style>
+        <p:txBody>
+          <a:bodyPr rtlCol="0" anchor="ctr"/>
+          <a:lstStyle/>
+          <a:p>
+            <a:pPr algn="ctr"/>
+          </a:p>
+        </p:txBody>
+      </p:sp>
+      <p:sp>
+        <p:nvSpPr>
+          <p:cNvPr id="8" name="TextBox 7"/>
+          <p:cNvSpPr txBox="1"/>
+          <p:nvPr/>
+        </p:nvSpPr>
+        <p:spPr>
+          <a:xfrm>
+            <a:off x="694944" y="2487168"/>
+            <a:ext cx="3182112" cy="822960"/>
+          </a:xfrm>
+          <a:prstGeom prst="rect">
+            <a:avLst/>
+          </a:prstGeom>
+          <a:noFill/>
+        </p:spPr>
+        <p:txBody>
+          <a:bodyPr wrap="square" anchor="ctr" lIns="36576" rIns="36576" tIns="18288" bIns="18288">
+            <a:spAutoFit/>
+          </a:bodyPr>
+          <a:lstStyle/>
+          <a:p>
+            <a:pPr algn="ctr">
+              <a:lnSpc>
+                <a:spcPct val="100000"/>
+              </a:lnSpc>
+            </a:pPr>
+            <a:r>
+              <a:rPr sz="1250" b="1">
+                <a:solidFill>
+                  <a:srgbClr val="17313F"/>
+                </a:solidFill>
+                <a:latin typeface="Calibri"/>
+              </a:rPr>
+              <a:t>AI investigation</a:t>
+            </a:r>
+          </a:p>
+        </p:txBody>
+      </p:sp>
+      <p:sp>
+        <p:nvSpPr>
+          <p:cNvPr id="9" name="TextBox 8"/>
+          <p:cNvSpPr txBox="1"/>
+          <p:nvPr/>
+        </p:nvSpPr>
+        <p:spPr>
+          <a:xfrm>
+            <a:off x="3950207" y="2697480"/>
+            <a:ext cx="384048" cy="402336"/>
+          </a:xfrm>
+          <a:prstGeom prst="rect">
+            <a:avLst/>
+          </a:prstGeom>
+          <a:noFill/>
+        </p:spPr>
+        <p:txBody>
+          <a:bodyPr wrap="square" anchor="ctr" lIns="36576" rIns="36576" tIns="18288" bIns="18288">
+            <a:spAutoFit/>
+          </a:bodyPr>
+          <a:lstStyle/>
+          <a:p>
+            <a:pPr algn="ctr">
+              <a:lnSpc>
+                <a:spcPct val="105000"/>
+              </a:lnSpc>
+            </a:pPr>
+            <a:r>
+              <a:rPr sz="2000" b="1">
+                <a:solidFill>
+                  <a:srgbClr val="9FB6C0"/>
+                </a:solidFill>
+                <a:latin typeface="Calibri"/>
+              </a:rPr>
+              <a:t>→</a:t>
+            </a:r>
+          </a:p>
+        </p:txBody>
+      </p:sp>
+      <p:sp>
+        <p:nvSpPr>
+          <p:cNvPr id="10" name="Rounded Rectangle 9"/>
+          <p:cNvSpPr/>
+          <p:nvPr/>
+        </p:nvSpPr>
+        <p:spPr>
+          <a:xfrm>
+            <a:off x="4343400" y="2487168"/>
+            <a:ext cx="3291840" cy="822960"/>
+          </a:xfrm>
+          <a:prstGeom prst="roundRect">
+            <a:avLst>
+              <a:gd name="adj" fmla="val 12000"/>
+            </a:avLst>
+          </a:prstGeom>
+          <a:solidFill>
+            <a:srgbClr val="F4FAFB"/>
+          </a:solidFill>
+          <a:ln w="12700">
+            <a:solidFill>
+              <a:srgbClr val="DCE8EE"/>
+            </a:solidFill>
+          </a:ln>
+          <a:effectLst/>
+        </p:spPr>
+        <p:style>
+          <a:lnRef idx="1">
+            <a:schemeClr val="accent1"/>
+          </a:lnRef>
+          <a:fillRef idx="3">
+            <a:schemeClr val="accent1"/>
+          </a:fillRef>
+          <a:effectRef idx="2">
+            <a:schemeClr val="accent1"/>
+          </a:effectRef>
+          <a:fontRef idx="minor">
+            <a:schemeClr val="lt1"/>
+          </a:fontRef>
+        </p:style>
+        <p:txBody>
+          <a:bodyPr rtlCol="0" anchor="ctr"/>
+          <a:lstStyle/>
+          <a:p>
+            <a:pPr algn="ctr"/>
+          </a:p>
+        </p:txBody>
+      </p:sp>
+      <p:sp>
+        <p:nvSpPr>
+          <p:cNvPr id="11" name="TextBox 10"/>
+          <p:cNvSpPr txBox="1"/>
+          <p:nvPr/>
+        </p:nvSpPr>
+        <p:spPr>
+          <a:xfrm>
+            <a:off x="4398264" y="2487168"/>
+            <a:ext cx="3182112" cy="822960"/>
+          </a:xfrm>
+          <a:prstGeom prst="rect">
+            <a:avLst/>
+          </a:prstGeom>
+          <a:noFill/>
+        </p:spPr>
+        <p:txBody>
+          <a:bodyPr wrap="square" anchor="ctr" lIns="36576" rIns="36576" tIns="18288" bIns="18288">
+            <a:spAutoFit/>
+          </a:bodyPr>
+          <a:lstStyle/>
+          <a:p>
+            <a:pPr algn="ctr">
+              <a:lnSpc>
+                <a:spcPct val="100000"/>
+              </a:lnSpc>
+            </a:pPr>
+            <a:r>
+              <a:rPr sz="1250" b="1">
+                <a:solidFill>
+                  <a:srgbClr val="17313F"/>
+                </a:solidFill>
+                <a:latin typeface="Calibri"/>
+              </a:rPr>
+              <a:t>Legal review</a:t>
+            </a:r>
+          </a:p>
+        </p:txBody>
+      </p:sp>
+      <p:sp>
+        <p:nvSpPr>
+          <p:cNvPr id="12" name="TextBox 11"/>
+          <p:cNvSpPr txBox="1"/>
+          <p:nvPr/>
+        </p:nvSpPr>
+        <p:spPr>
+          <a:xfrm>
+            <a:off x="7653527" y="2697480"/>
+            <a:ext cx="384048" cy="402336"/>
+          </a:xfrm>
+          <a:prstGeom prst="rect">
+            <a:avLst/>
+          </a:prstGeom>
+          <a:noFill/>
+        </p:spPr>
+        <p:txBody>
+          <a:bodyPr wrap="square" anchor="ctr" lIns="36576" rIns="36576" tIns="18288" bIns="18288">
+            <a:spAutoFit/>
+          </a:bodyPr>
+          <a:lstStyle/>
+          <a:p>
+            <a:pPr algn="ctr">
+              <a:lnSpc>
+                <a:spcPct val="105000"/>
+              </a:lnSpc>
+            </a:pPr>
+            <a:r>
+              <a:rPr sz="2000" b="1">
+                <a:solidFill>
+                  <a:srgbClr val="9FB6C0"/>
+                </a:solidFill>
+                <a:latin typeface="Calibri"/>
+              </a:rPr>
+              <a:t>→</a:t>
+            </a:r>
+          </a:p>
+        </p:txBody>
+      </p:sp>
+      <p:sp>
+        <p:nvSpPr>
+          <p:cNvPr id="13" name="Rounded Rectangle 12"/>
+          <p:cNvSpPr/>
+          <p:nvPr/>
+        </p:nvSpPr>
+        <p:spPr>
+          <a:xfrm>
+            <a:off x="8046719" y="2487168"/>
+            <a:ext cx="3291840" cy="822960"/>
+          </a:xfrm>
+          <a:prstGeom prst="roundRect">
+            <a:avLst>
+              <a:gd name="adj" fmla="val 12000"/>
+            </a:avLst>
+          </a:prstGeom>
+          <a:solidFill>
+            <a:srgbClr val="F4FAFB"/>
+          </a:solidFill>
+          <a:ln w="12700">
+            <a:solidFill>
+              <a:srgbClr val="DCE8EE"/>
+            </a:solidFill>
+          </a:ln>
+          <a:effectLst/>
+        </p:spPr>
+        <p:style>
+          <a:lnRef idx="1">
+            <a:schemeClr val="accent1"/>
+          </a:lnRef>
+          <a:fillRef idx="3">
+            <a:schemeClr val="accent1"/>
+          </a:fillRef>
+          <a:effectRef idx="2">
+            <a:schemeClr val="accent1"/>
+          </a:effectRef>
+          <a:fontRef idx="minor">
+            <a:schemeClr val="lt1"/>
+          </a:fontRef>
+        </p:style>
+        <p:txBody>
+          <a:bodyPr rtlCol="0" anchor="ctr"/>
+          <a:lstStyle/>
+          <a:p>
+            <a:pPr algn="ctr"/>
+          </a:p>
+        </p:txBody>
+      </p:sp>
+      <p:sp>
+        <p:nvSpPr>
+          <p:cNvPr id="14" name="TextBox 13"/>
+          <p:cNvSpPr txBox="1"/>
+          <p:nvPr/>
+        </p:nvSpPr>
+        <p:spPr>
+          <a:xfrm>
+            <a:off x="8101583" y="2487168"/>
+            <a:ext cx="3182112" cy="822960"/>
+          </a:xfrm>
+          <a:prstGeom prst="rect">
+            <a:avLst/>
+          </a:prstGeom>
+          <a:noFill/>
+        </p:spPr>
+        <p:txBody>
+          <a:bodyPr wrap="square" anchor="ctr" lIns="36576" rIns="36576" tIns="18288" bIns="18288">
+            <a:spAutoFit/>
+          </a:bodyPr>
+          <a:lstStyle/>
+          <a:p>
+            <a:pPr algn="ctr">
+              <a:lnSpc>
+                <a:spcPct val="100000"/>
+              </a:lnSpc>
+            </a:pPr>
+            <a:r>
+              <a:rPr sz="1250" b="1">
+                <a:solidFill>
+                  <a:srgbClr val="17313F"/>
+                </a:solidFill>
+                <a:latin typeface="Calibri"/>
+              </a:rPr>
+              <a:t>Update investigation playbook</a:t>
+            </a:r>
+          </a:p>
+        </p:txBody>
+      </p:sp>
+      <p:sp>
+        <p:nvSpPr>
+          <p:cNvPr id="15" name="Rounded Rectangle 14"/>
+          <p:cNvSpPr/>
+          <p:nvPr/>
+        </p:nvSpPr>
+        <p:spPr>
+          <a:xfrm>
+            <a:off x="548640" y="3419856"/>
+            <a:ext cx="11091672" cy="566928"/>
+          </a:xfrm>
+          <a:prstGeom prst="roundRect">
+            <a:avLst>
+              <a:gd name="adj" fmla="val 18000"/>
+            </a:avLst>
+          </a:prstGeom>
+          <a:solidFill>
+            <a:srgbClr val="F4FAFB"/>
+          </a:solidFill>
+          <a:ln w="15240">
+            <a:solidFill>
+              <a:srgbClr val="1BA39C"/>
+            </a:solidFill>
+            <a:prstDash val="dash"/>
+          </a:ln>
+          <a:effectLst/>
+        </p:spPr>
+        <p:style>
+          <a:lnRef idx="1">
+            <a:schemeClr val="accent1"/>
+          </a:lnRef>
+          <a:fillRef idx="3">
+            <a:schemeClr val="accent1"/>
+          </a:fillRef>
+          <a:effectRef idx="2">
+            <a:schemeClr val="accent1"/>
+          </a:effectRef>
+          <a:fontRef idx="minor">
+            <a:schemeClr val="lt1"/>
+          </a:fontRef>
+        </p:style>
+        <p:txBody>
+          <a:bodyPr rtlCol="0" anchor="ctr"/>
+          <a:lstStyle/>
+          <a:p>
+            <a:pPr algn="ctr"/>
+          </a:p>
+        </p:txBody>
+      </p:sp>
+      <p:sp>
+        <p:nvSpPr>
+          <p:cNvPr id="16" name="TextBox 15"/>
+          <p:cNvSpPr txBox="1"/>
+          <p:nvPr/>
+        </p:nvSpPr>
+        <p:spPr>
+          <a:xfrm>
+            <a:off x="868680" y="3419856"/>
+            <a:ext cx="10515600" cy="566928"/>
+          </a:xfrm>
+          <a:prstGeom prst="rect">
+            <a:avLst/>
+          </a:prstGeom>
+          <a:noFill/>
+        </p:spPr>
+        <p:txBody>
+          <a:bodyPr wrap="square" anchor="ctr" lIns="36576" rIns="36576" tIns="18288" bIns="18288">
+            <a:spAutoFit/>
+          </a:bodyPr>
+          <a:lstStyle/>
+          <a:p>
+            <a:pPr algn="l">
+              <a:lnSpc>
+                <a:spcPct val="105000"/>
+              </a:lnSpc>
+            </a:pPr>
+            <a:r>
+              <a:rPr sz="1250" b="1">
+                <a:solidFill>
+                  <a:srgbClr val="1BA39C"/>
+                </a:solidFill>
+                <a:latin typeface="Calibri"/>
+              </a:rPr>
+              <a:t>Feedback: </a:t>
+            </a:r>
+            <a:r>
+              <a:rPr sz="1250" b="0">
+                <a:solidFill>
+                  <a:srgbClr val="17313F"/>
+                </a:solidFill>
+                <a:latin typeface="Calibri"/>
+              </a:rPr>
+              <a:t>each review's misses become reusable playbooks — next time digs more accurately and completely.</a:t>
+            </a:r>
+          </a:p>
+        </p:txBody>
+      </p:sp>
+      <p:sp>
+        <p:nvSpPr>
+          <p:cNvPr id="17" name="TextBox 16"/>
+          <p:cNvSpPr txBox="1"/>
+          <p:nvPr/>
+        </p:nvSpPr>
+        <p:spPr>
+          <a:xfrm>
+            <a:off x="685800" y="4224528"/>
+            <a:ext cx="10058400" cy="292608"/>
+          </a:xfrm>
+          <a:prstGeom prst="rect">
+            <a:avLst/>
+          </a:prstGeom>
+          <a:noFill/>
+        </p:spPr>
+        <p:txBody>
+          <a:bodyPr wrap="square" anchor="t" lIns="36576" rIns="36576" tIns="18288" bIns="18288">
+            <a:spAutoFit/>
+          </a:bodyPr>
+          <a:lstStyle/>
+          <a:p>
+            <a:pPr algn="l">
+              <a:lnSpc>
+                <a:spcPct val="105000"/>
+              </a:lnSpc>
+            </a:pPr>
+            <a:r>
+              <a:rPr sz="1300" b="1">
+                <a:solidFill>
+                  <a:srgbClr val="C9861A"/>
+                </a:solidFill>
+                <a:latin typeface="Calibri"/>
+              </a:rPr>
+              <a:t>Loop B · Keep discovering new T1 / T2 rules</a:t>
+            </a:r>
+          </a:p>
+        </p:txBody>
+      </p:sp>
+      <p:sp>
+        <p:nvSpPr>
+          <p:cNvPr id="18" name="Rounded Rectangle 17"/>
+          <p:cNvSpPr/>
+          <p:nvPr/>
+        </p:nvSpPr>
+        <p:spPr>
+          <a:xfrm>
+            <a:off x="685800" y="4562856"/>
+            <a:ext cx="2331720" cy="822960"/>
+          </a:xfrm>
+          <a:prstGeom prst="roundRect">
+            <a:avLst>
+              <a:gd name="adj" fmla="val 12000"/>
+            </a:avLst>
+          </a:prstGeom>
+          <a:solidFill>
+            <a:srgbClr val="F4FAFB"/>
+          </a:solidFill>
+          <a:ln w="12700">
+            <a:solidFill>
+              <a:srgbClr val="DCE8EE"/>
+            </a:solidFill>
+          </a:ln>
+          <a:effectLst/>
+        </p:spPr>
+        <p:style>
+          <a:lnRef idx="1">
+            <a:schemeClr val="accent1"/>
+          </a:lnRef>
+          <a:fillRef idx="3">
+            <a:schemeClr val="accent1"/>
+          </a:fillRef>
+          <a:effectRef idx="2">
+            <a:schemeClr val="accent1"/>
+          </a:effectRef>
+          <a:fontRef idx="minor">
+            <a:schemeClr val="lt1"/>
+          </a:fontRef>
+        </p:style>
+        <p:txBody>
+          <a:bodyPr rtlCol="0" anchor="ctr"/>
+          <a:lstStyle/>
+          <a:p>
+            <a:pPr algn="ctr"/>
+          </a:p>
+        </p:txBody>
+      </p:sp>
+      <p:sp>
+        <p:nvSpPr>
+          <p:cNvPr id="19" name="TextBox 18"/>
+          <p:cNvSpPr txBox="1"/>
+          <p:nvPr/>
+        </p:nvSpPr>
+        <p:spPr>
+          <a:xfrm>
+            <a:off x="740664" y="4562856"/>
+            <a:ext cx="2221991" cy="822960"/>
+          </a:xfrm>
+          <a:prstGeom prst="rect">
+            <a:avLst/>
+          </a:prstGeom>
+          <a:noFill/>
+        </p:spPr>
+        <p:txBody>
+          <a:bodyPr wrap="square" anchor="ctr" lIns="36576" rIns="36576" tIns="18288" bIns="18288">
+            <a:spAutoFit/>
+          </a:bodyPr>
+          <a:lstStyle/>
+          <a:p>
+            <a:pPr algn="ctr">
+              <a:lnSpc>
+                <a:spcPct val="100000"/>
+              </a:lnSpc>
+            </a:pPr>
+            <a:r>
+              <a:rPr sz="1250" b="1">
+                <a:solidFill>
+                  <a:srgbClr val="17313F"/>
+                </a:solidFill>
+                <a:latin typeface="Calibri"/>
+              </a:rPr>
+              <a:t>Agent mines candidates</a:t>
+            </a:r>
+          </a:p>
+        </p:txBody>
+      </p:sp>
+      <p:sp>
+        <p:nvSpPr>
+          <p:cNvPr id="20" name="TextBox 19"/>
+          <p:cNvSpPr txBox="1"/>
+          <p:nvPr/>
+        </p:nvSpPr>
+        <p:spPr>
+          <a:xfrm>
+            <a:off x="3017520" y="4773168"/>
+            <a:ext cx="384048" cy="402336"/>
+          </a:xfrm>
+          <a:prstGeom prst="rect">
+            <a:avLst/>
+          </a:prstGeom>
+          <a:noFill/>
+        </p:spPr>
+        <p:txBody>
+          <a:bodyPr wrap="square" anchor="ctr" lIns="36576" rIns="36576" tIns="18288" bIns="18288">
+            <a:spAutoFit/>
+          </a:bodyPr>
+          <a:lstStyle/>
+          <a:p>
+            <a:pPr algn="ctr">
+              <a:lnSpc>
+                <a:spcPct val="105000"/>
+              </a:lnSpc>
+            </a:pPr>
+            <a:r>
+              <a:rPr sz="2000" b="1">
+                <a:solidFill>
+                  <a:srgbClr val="9FB6C0"/>
+                </a:solidFill>
+                <a:latin typeface="Calibri"/>
+              </a:rPr>
+              <a:t>→</a:t>
+            </a:r>
+          </a:p>
+        </p:txBody>
+      </p:sp>
+      <p:sp>
+        <p:nvSpPr>
+          <p:cNvPr id="21" name="Rounded Rectangle 20"/>
+          <p:cNvSpPr/>
+          <p:nvPr/>
+        </p:nvSpPr>
+        <p:spPr>
+          <a:xfrm>
+            <a:off x="3383280" y="4562856"/>
+            <a:ext cx="2331720" cy="822960"/>
+          </a:xfrm>
+          <a:prstGeom prst="roundRect">
+            <a:avLst>
+              <a:gd name="adj" fmla="val 12000"/>
+            </a:avLst>
+          </a:prstGeom>
+          <a:solidFill>
+            <a:srgbClr val="F4FAFB"/>
+          </a:solidFill>
+          <a:ln w="12700">
+            <a:solidFill>
+              <a:srgbClr val="DCE8EE"/>
+            </a:solidFill>
+          </a:ln>
+          <a:effectLst/>
+        </p:spPr>
+        <p:style>
+          <a:lnRef idx="1">
+            <a:schemeClr val="accent1"/>
+          </a:lnRef>
+          <a:fillRef idx="3">
+            <a:schemeClr val="accent1"/>
+          </a:fillRef>
+          <a:effectRef idx="2">
+            <a:schemeClr val="accent1"/>
+          </a:effectRef>
+          <a:fontRef idx="minor">
+            <a:schemeClr val="lt1"/>
+          </a:fontRef>
+        </p:style>
+        <p:txBody>
+          <a:bodyPr rtlCol="0" anchor="ctr"/>
+          <a:lstStyle/>
+          <a:p>
+            <a:pPr algn="ctr"/>
+          </a:p>
+        </p:txBody>
+      </p:sp>
+      <p:sp>
+        <p:nvSpPr>
+          <p:cNvPr id="22" name="TextBox 21"/>
+          <p:cNvSpPr txBox="1"/>
+          <p:nvPr/>
+        </p:nvSpPr>
+        <p:spPr>
+          <a:xfrm>
+            <a:off x="3438144" y="4562856"/>
+            <a:ext cx="2221991" cy="822960"/>
+          </a:xfrm>
+          <a:prstGeom prst="rect">
+            <a:avLst/>
+          </a:prstGeom>
+          <a:noFill/>
+        </p:spPr>
+        <p:txBody>
+          <a:bodyPr wrap="square" anchor="ctr" lIns="36576" rIns="36576" tIns="18288" bIns="18288">
+            <a:spAutoFit/>
+          </a:bodyPr>
+          <a:lstStyle/>
+          <a:p>
+            <a:pPr algn="ctr">
+              <a:lnSpc>
+                <a:spcPct val="100000"/>
+              </a:lnSpc>
+            </a:pPr>
+            <a:r>
+              <a:rPr sz="1250" b="1">
+                <a:solidFill>
+                  <a:srgbClr val="17313F"/>
+                </a:solidFill>
+                <a:latin typeface="Calibri"/>
+              </a:rPr>
+              <a:t>PPV calibration</a:t>
+            </a:r>
+          </a:p>
+        </p:txBody>
+      </p:sp>
+      <p:sp>
+        <p:nvSpPr>
+          <p:cNvPr id="23" name="TextBox 22"/>
+          <p:cNvSpPr txBox="1"/>
+          <p:nvPr/>
+        </p:nvSpPr>
+        <p:spPr>
+          <a:xfrm>
+            <a:off x="5715000" y="4773168"/>
+            <a:ext cx="384048" cy="402336"/>
+          </a:xfrm>
+          <a:prstGeom prst="rect">
+            <a:avLst/>
+          </a:prstGeom>
+          <a:noFill/>
+        </p:spPr>
+        <p:txBody>
+          <a:bodyPr wrap="square" anchor="ctr" lIns="36576" rIns="36576" tIns="18288" bIns="18288">
+            <a:spAutoFit/>
+          </a:bodyPr>
+          <a:lstStyle/>
+          <a:p>
+            <a:pPr algn="ctr">
+              <a:lnSpc>
+                <a:spcPct val="105000"/>
+              </a:lnSpc>
+            </a:pPr>
+            <a:r>
+              <a:rPr sz="2000" b="1">
+                <a:solidFill>
+                  <a:srgbClr val="9FB6C0"/>
+                </a:solidFill>
+                <a:latin typeface="Calibri"/>
+              </a:rPr>
+              <a:t>→</a:t>
+            </a:r>
+          </a:p>
+        </p:txBody>
+      </p:sp>
+      <p:sp>
+        <p:nvSpPr>
+          <p:cNvPr id="24" name="Rounded Rectangle 23"/>
+          <p:cNvSpPr/>
+          <p:nvPr/>
+        </p:nvSpPr>
+        <p:spPr>
+          <a:xfrm>
+            <a:off x="6080760" y="4562856"/>
+            <a:ext cx="2331720" cy="822960"/>
+          </a:xfrm>
+          <a:prstGeom prst="roundRect">
+            <a:avLst>
+              <a:gd name="adj" fmla="val 12000"/>
+            </a:avLst>
+          </a:prstGeom>
+          <a:solidFill>
+            <a:srgbClr val="F4FAFB"/>
+          </a:solidFill>
+          <a:ln w="12700">
+            <a:solidFill>
+              <a:srgbClr val="DCE8EE"/>
+            </a:solidFill>
+          </a:ln>
+          <a:effectLst/>
+        </p:spPr>
+        <p:style>
+          <a:lnRef idx="1">
+            <a:schemeClr val="accent1"/>
+          </a:lnRef>
+          <a:fillRef idx="3">
+            <a:schemeClr val="accent1"/>
+          </a:fillRef>
+          <a:effectRef idx="2">
+            <a:schemeClr val="accent1"/>
+          </a:effectRef>
+          <a:fontRef idx="minor">
+            <a:schemeClr val="lt1"/>
+          </a:fontRef>
+        </p:style>
+        <p:txBody>
+          <a:bodyPr rtlCol="0" anchor="ctr"/>
+          <a:lstStyle/>
+          <a:p>
+            <a:pPr algn="ctr"/>
+          </a:p>
+        </p:txBody>
+      </p:sp>
+      <p:sp>
+        <p:nvSpPr>
+          <p:cNvPr id="25" name="TextBox 24"/>
+          <p:cNvSpPr txBox="1"/>
+          <p:nvPr/>
+        </p:nvSpPr>
+        <p:spPr>
+          <a:xfrm>
+            <a:off x="6135624" y="4562856"/>
+            <a:ext cx="2221991" cy="822960"/>
+          </a:xfrm>
+          <a:prstGeom prst="rect">
+            <a:avLst/>
+          </a:prstGeom>
+          <a:noFill/>
+        </p:spPr>
+        <p:txBody>
+          <a:bodyPr wrap="square" anchor="ctr" lIns="36576" rIns="36576" tIns="18288" bIns="18288">
+            <a:spAutoFit/>
+          </a:bodyPr>
+          <a:lstStyle/>
+          <a:p>
+            <a:pPr algn="ctr">
+              <a:lnSpc>
+                <a:spcPct val="100000"/>
+              </a:lnSpc>
+            </a:pPr>
+            <a:r>
+              <a:rPr sz="1250" b="1">
+                <a:solidFill>
+                  <a:srgbClr val="17313F"/>
+                </a:solidFill>
+                <a:latin typeface="Calibri"/>
+              </a:rPr>
+              <a:t>Human approval</a:t>
+            </a:r>
+          </a:p>
+        </p:txBody>
+      </p:sp>
+      <p:sp>
+        <p:nvSpPr>
+          <p:cNvPr id="26" name="TextBox 25"/>
+          <p:cNvSpPr txBox="1"/>
+          <p:nvPr/>
+        </p:nvSpPr>
+        <p:spPr>
+          <a:xfrm>
+            <a:off x="8412480" y="4773168"/>
+            <a:ext cx="384048" cy="402336"/>
+          </a:xfrm>
+          <a:prstGeom prst="rect">
+            <a:avLst/>
+          </a:prstGeom>
+          <a:noFill/>
+        </p:spPr>
+        <p:txBody>
+          <a:bodyPr wrap="square" anchor="ctr" lIns="36576" rIns="36576" tIns="18288" bIns="18288">
+            <a:spAutoFit/>
+          </a:bodyPr>
+          <a:lstStyle/>
+          <a:p>
+            <a:pPr algn="ctr">
+              <a:lnSpc>
+                <a:spcPct val="105000"/>
+              </a:lnSpc>
+            </a:pPr>
+            <a:r>
+              <a:rPr sz="2000" b="1">
+                <a:solidFill>
+                  <a:srgbClr val="9FB6C0"/>
+                </a:solidFill>
+                <a:latin typeface="Calibri"/>
+              </a:rPr>
+              <a:t>→</a:t>
+            </a:r>
+          </a:p>
+        </p:txBody>
+      </p:sp>
+      <p:sp>
+        <p:nvSpPr>
+          <p:cNvPr id="27" name="Rounded Rectangle 26"/>
+          <p:cNvSpPr/>
+          <p:nvPr/>
+        </p:nvSpPr>
+        <p:spPr>
+          <a:xfrm>
+            <a:off x="8778240" y="4562856"/>
+            <a:ext cx="2331720" cy="822960"/>
+          </a:xfrm>
+          <a:prstGeom prst="roundRect">
+            <a:avLst>
+              <a:gd name="adj" fmla="val 12000"/>
+            </a:avLst>
+          </a:prstGeom>
+          <a:solidFill>
+            <a:srgbClr val="F4FAFB"/>
+          </a:solidFill>
+          <a:ln w="12700">
+            <a:solidFill>
+              <a:srgbClr val="DCE8EE"/>
+            </a:solidFill>
+          </a:ln>
+          <a:effectLst/>
+        </p:spPr>
+        <p:style>
+          <a:lnRef idx="1">
+            <a:schemeClr val="accent1"/>
+          </a:lnRef>
+          <a:fillRef idx="3">
+            <a:schemeClr val="accent1"/>
+          </a:fillRef>
+          <a:effectRef idx="2">
+            <a:schemeClr val="accent1"/>
+          </a:effectRef>
+          <a:fontRef idx="minor">
+            <a:schemeClr val="lt1"/>
+          </a:fontRef>
+        </p:style>
+        <p:txBody>
+          <a:bodyPr rtlCol="0" anchor="ctr"/>
+          <a:lstStyle/>
+          <a:p>
+            <a:pPr algn="ctr"/>
+          </a:p>
+        </p:txBody>
+      </p:sp>
+      <p:sp>
+        <p:nvSpPr>
+          <p:cNvPr id="28" name="TextBox 27"/>
+          <p:cNvSpPr txBox="1"/>
+          <p:nvPr/>
+        </p:nvSpPr>
+        <p:spPr>
+          <a:xfrm>
+            <a:off x="8833104" y="4562856"/>
+            <a:ext cx="2221991" cy="822960"/>
+          </a:xfrm>
+          <a:prstGeom prst="rect">
+            <a:avLst/>
+          </a:prstGeom>
+          <a:noFill/>
+        </p:spPr>
+        <p:txBody>
+          <a:bodyPr wrap="square" anchor="ctr" lIns="36576" rIns="36576" tIns="18288" bIns="18288">
+            <a:spAutoFit/>
+          </a:bodyPr>
+          <a:lstStyle/>
+          <a:p>
+            <a:pPr algn="ctr">
+              <a:lnSpc>
+                <a:spcPct val="100000"/>
+              </a:lnSpc>
+            </a:pPr>
+            <a:r>
+              <a:rPr sz="1250" b="1">
+                <a:solidFill>
+                  <a:srgbClr val="17313F"/>
+                </a:solidFill>
+                <a:latin typeface="Calibri"/>
+              </a:rPr>
+              <a:t>New T1 / T2 rule</a:t>
+            </a:r>
+          </a:p>
+        </p:txBody>
+      </p:sp>
+      <p:sp>
+        <p:nvSpPr>
+          <p:cNvPr id="29" name="Rounded Rectangle 28"/>
+          <p:cNvSpPr/>
+          <p:nvPr/>
+        </p:nvSpPr>
+        <p:spPr>
+          <a:xfrm>
+            <a:off x="548640" y="5495544"/>
+            <a:ext cx="11091672" cy="566928"/>
+          </a:xfrm>
+          <a:prstGeom prst="roundRect">
+            <a:avLst>
+              <a:gd name="adj" fmla="val 18000"/>
+            </a:avLst>
+          </a:prstGeom>
+          <a:solidFill>
+            <a:srgbClr val="F4FAFB"/>
+          </a:solidFill>
+          <a:ln w="15240">
+            <a:solidFill>
+              <a:srgbClr val="C9861A"/>
+            </a:solidFill>
+            <a:prstDash val="dash"/>
+          </a:ln>
+          <a:effectLst/>
+        </p:spPr>
+        <p:style>
+          <a:lnRef idx="1">
+            <a:schemeClr val="accent1"/>
+          </a:lnRef>
+          <a:fillRef idx="3">
+            <a:schemeClr val="accent1"/>
+          </a:fillRef>
+          <a:effectRef idx="2">
+            <a:schemeClr val="accent1"/>
+          </a:effectRef>
+          <a:fontRef idx="minor">
+            <a:schemeClr val="lt1"/>
+          </a:fontRef>
+        </p:style>
+        <p:txBody>
+          <a:bodyPr rtlCol="0" anchor="ctr"/>
+          <a:lstStyle/>
+          <a:p>
+            <a:pPr algn="ctr"/>
+          </a:p>
+        </p:txBody>
+      </p:sp>
+      <p:sp>
+        <p:nvSpPr>
+          <p:cNvPr id="30" name="TextBox 29"/>
+          <p:cNvSpPr txBox="1"/>
+          <p:nvPr/>
+        </p:nvSpPr>
+        <p:spPr>
+          <a:xfrm>
+            <a:off x="868680" y="5495544"/>
+            <a:ext cx="10515600" cy="566928"/>
+          </a:xfrm>
+          <a:prstGeom prst="rect">
+            <a:avLst/>
+          </a:prstGeom>
+          <a:noFill/>
+        </p:spPr>
+        <p:txBody>
+          <a:bodyPr wrap="square" anchor="ctr" lIns="36576" rIns="36576" tIns="18288" bIns="18288">
+            <a:spAutoFit/>
+          </a:bodyPr>
+          <a:lstStyle/>
+          <a:p>
+            <a:pPr algn="l">
+              <a:lnSpc>
+                <a:spcPct val="105000"/>
+              </a:lnSpc>
+            </a:pPr>
+            <a:r>
+              <a:rPr sz="1250" b="1">
+                <a:solidFill>
+                  <a:srgbClr val="C9861A"/>
+                </a:solidFill>
+                <a:latin typeface="Calibri"/>
+              </a:rPr>
+              <a:t>Gate: </a:t>
+            </a:r>
+            <a:r>
+              <a:rPr sz="1250" b="0">
+                <a:solidFill>
+                  <a:srgbClr val="17313F"/>
+                </a:solidFill>
+                <a:latin typeface="Calibri"/>
+              </a:rPr>
+              <a:t>the agent only proposes candidates; they go live only after they prove out + sign-off — evolution stays gated.</a:t>
+            </a:r>
+          </a:p>
+        </p:txBody>
+      </p:sp>
+    </p:spTree>
+  </p:cSld>
+  <p:clrMapOvr>
+    <a:masterClrMapping/>
+  </p:clrMapOvr>
+</p:sld>
+</file>
+
 <file path=ppt/slides/slide2.xml><?xml version="1.0" encoding="utf-8"?>
+<p:sld xmlns:a="http://schemas.openxmlformats.org/drawingml/2006/main" xmlns:p="http://schemas.openxmlformats.org/presentationml/2006/main" xmlns:r="http://schemas.openxmlformats.org/officeDocument/2006/relationships">
+  <p:cSld>
+    <p:bg>
+      <p:bgPr>
+        <a:solidFill>
+          <a:srgbClr val="FFFFFF"/>
+        </a:solidFill>
+        <a:effectLst/>
+      </p:bgPr>
+    </p:bg>
+    <p:spTree>
+      <p:nvGrpSpPr>
+        <p:cNvPr id="1" name=""/>
+        <p:cNvGrpSpPr/>
+        <p:nvPr/>
+      </p:nvGrpSpPr>
+      <p:grpSpPr/>
+      <p:sp>
+        <p:nvSpPr>
+          <p:cNvPr id="2" name="Rectangle 1"/>
+          <p:cNvSpPr/>
+          <p:nvPr/>
+        </p:nvSpPr>
+        <p:spPr>
+          <a:xfrm>
+            <a:off x="0" y="0"/>
+            <a:ext cx="256032" cy="6858000"/>
+          </a:xfrm>
+          <a:prstGeom prst="rect">
+            <a:avLst/>
+          </a:prstGeom>
+          <a:solidFill>
+            <a:srgbClr val="1BA39C"/>
+          </a:solidFill>
+          <a:ln>
+            <a:noFill/>
+          </a:ln>
+          <a:effectLst/>
+        </p:spPr>
+        <p:style>
+          <a:lnRef idx="1">
+            <a:schemeClr val="accent1"/>
+          </a:lnRef>
+          <a:fillRef idx="3">
+            <a:schemeClr val="accent1"/>
+          </a:fillRef>
+          <a:effectRef idx="2">
+            <a:schemeClr val="accent1"/>
+          </a:effectRef>
+          <a:fontRef idx="minor">
+            <a:schemeClr val="lt1"/>
+          </a:fontRef>
+        </p:style>
+        <p:txBody>
+          <a:bodyPr rtlCol="0" anchor="ctr"/>
+          <a:lstStyle/>
+          <a:p>
+            <a:pPr algn="ctr"/>
+          </a:p>
+        </p:txBody>
+      </p:sp>
+      <p:sp>
+        <p:nvSpPr>
+          <p:cNvPr id="3" name="TextBox 2"/>
+          <p:cNvSpPr txBox="1"/>
+          <p:nvPr/>
+        </p:nvSpPr>
+        <p:spPr>
+          <a:xfrm>
+            <a:off x="548640" y="457200"/>
+            <a:ext cx="9144000" cy="274320"/>
+          </a:xfrm>
+          <a:prstGeom prst="rect">
+            <a:avLst/>
+          </a:prstGeom>
+          <a:noFill/>
+        </p:spPr>
+        <p:txBody>
+          <a:bodyPr wrap="square" anchor="t" lIns="36576" rIns="36576" tIns="18288" bIns="18288">
+            <a:spAutoFit/>
+          </a:bodyPr>
+          <a:lstStyle/>
+          <a:p>
+            <a:pPr algn="l">
+              <a:lnSpc>
+                <a:spcPct val="105000"/>
+              </a:lnSpc>
+            </a:pPr>
+            <a:r>
+              <a:rPr sz="1200" b="1">
+                <a:solidFill>
+                  <a:srgbClr val="1BA39C"/>
+                </a:solidFill>
+                <a:latin typeface="Calibri"/>
+              </a:rPr>
+              <a:t>GOALS &amp; BENEFITS</a:t>
+            </a:r>
+          </a:p>
+        </p:txBody>
+      </p:sp>
+      <p:sp>
+        <p:nvSpPr>
+          <p:cNvPr id="4" name="TextBox 3"/>
+          <p:cNvSpPr txBox="1"/>
+          <p:nvPr/>
+        </p:nvSpPr>
+        <p:spPr>
+          <a:xfrm>
+            <a:off x="548640" y="749808"/>
+            <a:ext cx="11064240" cy="822960"/>
+          </a:xfrm>
+          <a:prstGeom prst="rect">
+            <a:avLst/>
+          </a:prstGeom>
+          <a:noFill/>
+        </p:spPr>
+        <p:txBody>
+          <a:bodyPr wrap="square" anchor="t" lIns="36576" rIns="36576" tIns="18288" bIns="18288">
+            <a:spAutoFit/>
+          </a:bodyPr>
+          <a:lstStyle/>
+          <a:p>
+            <a:pPr algn="l">
+              <a:lnSpc>
+                <a:spcPct val="105000"/>
+              </a:lnSpc>
+            </a:pPr>
+            <a:r>
+              <a:rPr sz="3000" b="1">
+                <a:solidFill>
+                  <a:srgbClr val="17313F"/>
+                </a:solidFill>
+                <a:latin typeface="Calibri"/>
+              </a:rPr>
+              <a:t>Help Legal catch potential laundering early</a:t>
+            </a:r>
+          </a:p>
+        </p:txBody>
+      </p:sp>
+      <p:sp>
+        <p:nvSpPr>
+          <p:cNvPr id="5" name="TextBox 4"/>
+          <p:cNvSpPr txBox="1"/>
+          <p:nvPr/>
+        </p:nvSpPr>
+        <p:spPr>
+          <a:xfrm>
+            <a:off x="566928" y="1627632"/>
+            <a:ext cx="10972800" cy="548640"/>
+          </a:xfrm>
+          <a:prstGeom prst="rect">
+            <a:avLst/>
+          </a:prstGeom>
+          <a:noFill/>
+        </p:spPr>
+        <p:txBody>
+          <a:bodyPr wrap="square" anchor="t" lIns="36576" rIns="36576" tIns="18288" bIns="18288">
+            <a:spAutoFit/>
+          </a:bodyPr>
+          <a:lstStyle/>
+          <a:p>
+            <a:pPr algn="l">
+              <a:lnSpc>
+                <a:spcPct val="115000"/>
+              </a:lnSpc>
+            </a:pPr>
+            <a:r>
+              <a:rPr sz="1400" b="0">
+                <a:solidFill>
+                  <a:srgbClr val="71838F"/>
+                </a:solidFill>
+                <a:latin typeface="Calibri"/>
+              </a:rPr>
+              <a:t>Shift from after-the-fact investigation to up-front detection — stop risk before the payment goes out.</a:t>
+            </a:r>
+          </a:p>
+        </p:txBody>
+      </p:sp>
+      <p:sp>
+        <p:nvSpPr>
+          <p:cNvPr id="6" name="Rounded Rectangle 5"/>
+          <p:cNvSpPr/>
+          <p:nvPr/>
+        </p:nvSpPr>
+        <p:spPr>
+          <a:xfrm>
+            <a:off x="548640" y="2377440"/>
+            <a:ext cx="5358384" cy="1783080"/>
+          </a:xfrm>
+          <a:prstGeom prst="roundRect">
+            <a:avLst>
+              <a:gd name="adj" fmla="val 10000"/>
+            </a:avLst>
+          </a:prstGeom>
+          <a:solidFill>
+            <a:srgbClr val="F4FAFB"/>
+          </a:solidFill>
+          <a:ln w="12700">
+            <a:solidFill>
+              <a:srgbClr val="DCE8EE"/>
+            </a:solidFill>
+          </a:ln>
+          <a:effectLst/>
+        </p:spPr>
+        <p:style>
+          <a:lnRef idx="1">
+            <a:schemeClr val="accent1"/>
+          </a:lnRef>
+          <a:fillRef idx="3">
+            <a:schemeClr val="accent1"/>
+          </a:fillRef>
+          <a:effectRef idx="2">
+            <a:schemeClr val="accent1"/>
+          </a:effectRef>
+          <a:fontRef idx="minor">
+            <a:schemeClr val="lt1"/>
+          </a:fontRef>
+        </p:style>
+        <p:txBody>
+          <a:bodyPr rtlCol="0" anchor="ctr"/>
+          <a:lstStyle/>
+          <a:p>
+            <a:pPr algn="ctr"/>
+          </a:p>
+        </p:txBody>
+      </p:sp>
+      <p:sp>
+        <p:nvSpPr>
+          <p:cNvPr id="7" name="Rounded Rectangle 6"/>
+          <p:cNvSpPr/>
+          <p:nvPr/>
+        </p:nvSpPr>
+        <p:spPr>
+          <a:xfrm>
+            <a:off x="822959" y="2670048"/>
+            <a:ext cx="566928" cy="566928"/>
+          </a:xfrm>
+          <a:prstGeom prst="roundRect">
+            <a:avLst>
+              <a:gd name="adj" fmla="val 25000"/>
+            </a:avLst>
+          </a:prstGeom>
+          <a:solidFill>
+            <a:srgbClr val="1BA39C"/>
+          </a:solidFill>
+          <a:ln>
+            <a:noFill/>
+          </a:ln>
+          <a:effectLst/>
+        </p:spPr>
+        <p:style>
+          <a:lnRef idx="1">
+            <a:schemeClr val="accent1"/>
+          </a:lnRef>
+          <a:fillRef idx="3">
+            <a:schemeClr val="accent1"/>
+          </a:fillRef>
+          <a:effectRef idx="2">
+            <a:schemeClr val="accent1"/>
+          </a:effectRef>
+          <a:fontRef idx="minor">
+            <a:schemeClr val="lt1"/>
+          </a:fontRef>
+        </p:style>
+        <p:txBody>
+          <a:bodyPr rtlCol="0" anchor="ctr" wrap="none"/>
+          <a:lstStyle/>
+          <a:p>
+            <a:pPr algn="ctr"/>
+            <a:r>
+              <a:rPr sz="2000" b="1">
+                <a:solidFill>
+                  <a:srgbClr val="FFFFFF"/>
+                </a:solidFill>
+                <a:latin typeface="Calibri"/>
+              </a:rPr>
+              <a:t>1</a:t>
+            </a:r>
+          </a:p>
+        </p:txBody>
+      </p:sp>
+      <p:sp>
+        <p:nvSpPr>
+          <p:cNvPr id="8" name="TextBox 7"/>
+          <p:cNvSpPr txBox="1"/>
+          <p:nvPr/>
+        </p:nvSpPr>
+        <p:spPr>
+          <a:xfrm>
+            <a:off x="1572768" y="2651760"/>
+            <a:ext cx="4078224" cy="457200"/>
+          </a:xfrm>
+          <a:prstGeom prst="rect">
+            <a:avLst/>
+          </a:prstGeom>
+          <a:noFill/>
+        </p:spPr>
+        <p:txBody>
+          <a:bodyPr wrap="square" anchor="ctr" lIns="36576" rIns="36576" tIns="18288" bIns="18288">
+            <a:spAutoFit/>
+          </a:bodyPr>
+          <a:lstStyle/>
+          <a:p>
+            <a:pPr algn="l">
+              <a:lnSpc>
+                <a:spcPct val="105000"/>
+              </a:lnSpc>
+            </a:pPr>
+            <a:r>
+              <a:rPr sz="1650" b="1">
+                <a:solidFill>
+                  <a:srgbClr val="17313F"/>
+                </a:solidFill>
+                <a:latin typeface="Calibri"/>
+              </a:rPr>
+              <a:t>Proactive detection</a:t>
+            </a:r>
+          </a:p>
+        </p:txBody>
+      </p:sp>
+      <p:sp>
+        <p:nvSpPr>
+          <p:cNvPr id="9" name="TextBox 8"/>
+          <p:cNvSpPr txBox="1"/>
+          <p:nvPr/>
+        </p:nvSpPr>
+        <p:spPr>
+          <a:xfrm>
+            <a:off x="859536" y="3310128"/>
+            <a:ext cx="4764024" cy="731520"/>
+          </a:xfrm>
+          <a:prstGeom prst="rect">
+            <a:avLst/>
+          </a:prstGeom>
+          <a:noFill/>
+        </p:spPr>
+        <p:txBody>
+          <a:bodyPr wrap="square" anchor="t" lIns="36576" rIns="36576" tIns="18288" bIns="18288">
+            <a:spAutoFit/>
+          </a:bodyPr>
+          <a:lstStyle/>
+          <a:p>
+            <a:pPr algn="l">
+              <a:lnSpc>
+                <a:spcPct val="118000"/>
+              </a:lnSpc>
+            </a:pPr>
+            <a:r>
+              <a:rPr sz="1250" b="0">
+                <a:solidFill>
+                  <a:srgbClr val="71838F"/>
+                </a:solidFill>
+                <a:latin typeface="Calibri"/>
+              </a:rPr>
+              <a:t>Flag potential laundering while the payment is in flight — hold risk before payout, not audit it afterward.</a:t>
+            </a:r>
+          </a:p>
+        </p:txBody>
+      </p:sp>
+      <p:sp>
+        <p:nvSpPr>
+          <p:cNvPr id="10" name="Rounded Rectangle 9"/>
+          <p:cNvSpPr/>
+          <p:nvPr/>
+        </p:nvSpPr>
+        <p:spPr>
+          <a:xfrm>
+            <a:off x="6291072" y="2377440"/>
+            <a:ext cx="5358384" cy="1783080"/>
+          </a:xfrm>
+          <a:prstGeom prst="roundRect">
+            <a:avLst>
+              <a:gd name="adj" fmla="val 10000"/>
+            </a:avLst>
+          </a:prstGeom>
+          <a:solidFill>
+            <a:srgbClr val="F4FAFB"/>
+          </a:solidFill>
+          <a:ln w="12700">
+            <a:solidFill>
+              <a:srgbClr val="DCE8EE"/>
+            </a:solidFill>
+          </a:ln>
+          <a:effectLst/>
+        </p:spPr>
+        <p:style>
+          <a:lnRef idx="1">
+            <a:schemeClr val="accent1"/>
+          </a:lnRef>
+          <a:fillRef idx="3">
+            <a:schemeClr val="accent1"/>
+          </a:fillRef>
+          <a:effectRef idx="2">
+            <a:schemeClr val="accent1"/>
+          </a:effectRef>
+          <a:fontRef idx="minor">
+            <a:schemeClr val="lt1"/>
+          </a:fontRef>
+        </p:style>
+        <p:txBody>
+          <a:bodyPr rtlCol="0" anchor="ctr"/>
+          <a:lstStyle/>
+          <a:p>
+            <a:pPr algn="ctr"/>
+          </a:p>
+        </p:txBody>
+      </p:sp>
+      <p:sp>
+        <p:nvSpPr>
+          <p:cNvPr id="11" name="Rounded Rectangle 10"/>
+          <p:cNvSpPr/>
+          <p:nvPr/>
+        </p:nvSpPr>
+        <p:spPr>
+          <a:xfrm>
+            <a:off x="6565392" y="2670048"/>
+            <a:ext cx="566928" cy="566928"/>
+          </a:xfrm>
+          <a:prstGeom prst="roundRect">
+            <a:avLst>
+              <a:gd name="adj" fmla="val 25000"/>
+            </a:avLst>
+          </a:prstGeom>
+          <a:solidFill>
+            <a:srgbClr val="1BA39C"/>
+          </a:solidFill>
+          <a:ln>
+            <a:noFill/>
+          </a:ln>
+          <a:effectLst/>
+        </p:spPr>
+        <p:style>
+          <a:lnRef idx="1">
+            <a:schemeClr val="accent1"/>
+          </a:lnRef>
+          <a:fillRef idx="3">
+            <a:schemeClr val="accent1"/>
+          </a:fillRef>
+          <a:effectRef idx="2">
+            <a:schemeClr val="accent1"/>
+          </a:effectRef>
+          <a:fontRef idx="minor">
+            <a:schemeClr val="lt1"/>
+          </a:fontRef>
+        </p:style>
+        <p:txBody>
+          <a:bodyPr rtlCol="0" anchor="ctr" wrap="none"/>
+          <a:lstStyle/>
+          <a:p>
+            <a:pPr algn="ctr"/>
+            <a:r>
+              <a:rPr sz="2000" b="1">
+                <a:solidFill>
+                  <a:srgbClr val="FFFFFF"/>
+                </a:solidFill>
+                <a:latin typeface="Calibri"/>
+              </a:rPr>
+              <a:t>2</a:t>
+            </a:r>
+          </a:p>
+        </p:txBody>
+      </p:sp>
+      <p:sp>
+        <p:nvSpPr>
+          <p:cNvPr id="12" name="TextBox 11"/>
+          <p:cNvSpPr txBox="1"/>
+          <p:nvPr/>
+        </p:nvSpPr>
+        <p:spPr>
+          <a:xfrm>
+            <a:off x="7315200" y="2651760"/>
+            <a:ext cx="4078224" cy="457200"/>
+          </a:xfrm>
+          <a:prstGeom prst="rect">
+            <a:avLst/>
+          </a:prstGeom>
+          <a:noFill/>
+        </p:spPr>
+        <p:txBody>
+          <a:bodyPr wrap="square" anchor="ctr" lIns="36576" rIns="36576" tIns="18288" bIns="18288">
+            <a:spAutoFit/>
+          </a:bodyPr>
+          <a:lstStyle/>
+          <a:p>
+            <a:pPr algn="l">
+              <a:lnSpc>
+                <a:spcPct val="105000"/>
+              </a:lnSpc>
+            </a:pPr>
+            <a:r>
+              <a:rPr sz="1650" b="1">
+                <a:solidFill>
+                  <a:srgbClr val="17313F"/>
+                </a:solidFill>
+                <a:latin typeface="Calibri"/>
+              </a:rPr>
+              <a:t>Focus on high value</a:t>
+            </a:r>
+          </a:p>
+        </p:txBody>
+      </p:sp>
+      <p:sp>
+        <p:nvSpPr>
+          <p:cNvPr id="13" name="TextBox 12"/>
+          <p:cNvSpPr txBox="1"/>
+          <p:nvPr/>
+        </p:nvSpPr>
+        <p:spPr>
+          <a:xfrm>
+            <a:off x="6601968" y="3310128"/>
+            <a:ext cx="4764024" cy="731520"/>
+          </a:xfrm>
+          <a:prstGeom prst="rect">
+            <a:avLst/>
+          </a:prstGeom>
+          <a:noFill/>
+        </p:spPr>
+        <p:txBody>
+          <a:bodyPr wrap="square" anchor="t" lIns="36576" rIns="36576" tIns="18288" bIns="18288">
+            <a:spAutoFit/>
+          </a:bodyPr>
+          <a:lstStyle/>
+          <a:p>
+            <a:pPr algn="l">
+              <a:lnSpc>
+                <a:spcPct val="118000"/>
+              </a:lnSpc>
+            </a:pPr>
+            <a:r>
+              <a:rPr sz="1250" b="0">
+                <a:solidFill>
+                  <a:srgbClr val="71838F"/>
+                </a:solidFill>
+                <a:latin typeface="Calibri"/>
+              </a:rPr>
+              <a:t>Surface the most-worth-reviewing few; spend Legal's limited capacity where it counts.</a:t>
+            </a:r>
+          </a:p>
+        </p:txBody>
+      </p:sp>
+      <p:sp>
+        <p:nvSpPr>
+          <p:cNvPr id="14" name="Rounded Rectangle 13"/>
+          <p:cNvSpPr/>
+          <p:nvPr/>
+        </p:nvSpPr>
+        <p:spPr>
+          <a:xfrm>
+            <a:off x="548640" y="4297680"/>
+            <a:ext cx="5358384" cy="1783080"/>
+          </a:xfrm>
+          <a:prstGeom prst="roundRect">
+            <a:avLst>
+              <a:gd name="adj" fmla="val 10000"/>
+            </a:avLst>
+          </a:prstGeom>
+          <a:solidFill>
+            <a:srgbClr val="F4FAFB"/>
+          </a:solidFill>
+          <a:ln w="12700">
+            <a:solidFill>
+              <a:srgbClr val="DCE8EE"/>
+            </a:solidFill>
+          </a:ln>
+          <a:effectLst/>
+        </p:spPr>
+        <p:style>
+          <a:lnRef idx="1">
+            <a:schemeClr val="accent1"/>
+          </a:lnRef>
+          <a:fillRef idx="3">
+            <a:schemeClr val="accent1"/>
+          </a:fillRef>
+          <a:effectRef idx="2">
+            <a:schemeClr val="accent1"/>
+          </a:effectRef>
+          <a:fontRef idx="minor">
+            <a:schemeClr val="lt1"/>
+          </a:fontRef>
+        </p:style>
+        <p:txBody>
+          <a:bodyPr rtlCol="0" anchor="ctr"/>
+          <a:lstStyle/>
+          <a:p>
+            <a:pPr algn="ctr"/>
+          </a:p>
+        </p:txBody>
+      </p:sp>
+      <p:sp>
+        <p:nvSpPr>
+          <p:cNvPr id="15" name="Rounded Rectangle 14"/>
+          <p:cNvSpPr/>
+          <p:nvPr/>
+        </p:nvSpPr>
+        <p:spPr>
+          <a:xfrm>
+            <a:off x="822959" y="4590288"/>
+            <a:ext cx="566928" cy="566928"/>
+          </a:xfrm>
+          <a:prstGeom prst="roundRect">
+            <a:avLst>
+              <a:gd name="adj" fmla="val 25000"/>
+            </a:avLst>
+          </a:prstGeom>
+          <a:solidFill>
+            <a:srgbClr val="1BA39C"/>
+          </a:solidFill>
+          <a:ln>
+            <a:noFill/>
+          </a:ln>
+          <a:effectLst/>
+        </p:spPr>
+        <p:style>
+          <a:lnRef idx="1">
+            <a:schemeClr val="accent1"/>
+          </a:lnRef>
+          <a:fillRef idx="3">
+            <a:schemeClr val="accent1"/>
+          </a:fillRef>
+          <a:effectRef idx="2">
+            <a:schemeClr val="accent1"/>
+          </a:effectRef>
+          <a:fontRef idx="minor">
+            <a:schemeClr val="lt1"/>
+          </a:fontRef>
+        </p:style>
+        <p:txBody>
+          <a:bodyPr rtlCol="0" anchor="ctr" wrap="none"/>
+          <a:lstStyle/>
+          <a:p>
+            <a:pPr algn="ctr"/>
+            <a:r>
+              <a:rPr sz="2000" b="1">
+                <a:solidFill>
+                  <a:srgbClr val="FFFFFF"/>
+                </a:solidFill>
+                <a:latin typeface="Calibri"/>
+              </a:rPr>
+              <a:t>3</a:t>
+            </a:r>
+          </a:p>
+        </p:txBody>
+      </p:sp>
+      <p:sp>
+        <p:nvSpPr>
+          <p:cNvPr id="16" name="TextBox 15"/>
+          <p:cNvSpPr txBox="1"/>
+          <p:nvPr/>
+        </p:nvSpPr>
+        <p:spPr>
+          <a:xfrm>
+            <a:off x="1572768" y="4572000"/>
+            <a:ext cx="4078224" cy="457200"/>
+          </a:xfrm>
+          <a:prstGeom prst="rect">
+            <a:avLst/>
+          </a:prstGeom>
+          <a:noFill/>
+        </p:spPr>
+        <p:txBody>
+          <a:bodyPr wrap="square" anchor="ctr" lIns="36576" rIns="36576" tIns="18288" bIns="18288">
+            <a:spAutoFit/>
+          </a:bodyPr>
+          <a:lstStyle/>
+          <a:p>
+            <a:pPr algn="l">
+              <a:lnSpc>
+                <a:spcPct val="105000"/>
+              </a:lnSpc>
+            </a:pPr>
+            <a:r>
+              <a:rPr sz="1650" b="1">
+                <a:solidFill>
+                  <a:srgbClr val="17313F"/>
+                </a:solidFill>
+                <a:latin typeface="Calibri"/>
+              </a:rPr>
+              <a:t>Explainable &amp; auditable</a:t>
+            </a:r>
+          </a:p>
+        </p:txBody>
+      </p:sp>
+      <p:sp>
+        <p:nvSpPr>
+          <p:cNvPr id="17" name="TextBox 16"/>
+          <p:cNvSpPr txBox="1"/>
+          <p:nvPr/>
+        </p:nvSpPr>
+        <p:spPr>
+          <a:xfrm>
+            <a:off x="859536" y="5230368"/>
+            <a:ext cx="4764024" cy="731520"/>
+          </a:xfrm>
+          <a:prstGeom prst="rect">
+            <a:avLst/>
+          </a:prstGeom>
+          <a:noFill/>
+        </p:spPr>
+        <p:txBody>
+          <a:bodyPr wrap="square" anchor="t" lIns="36576" rIns="36576" tIns="18288" bIns="18288">
+            <a:spAutoFit/>
+          </a:bodyPr>
+          <a:lstStyle/>
+          <a:p>
+            <a:pPr algn="l">
+              <a:lnSpc>
+                <a:spcPct val="118000"/>
+              </a:lnSpc>
+            </a:pPr>
+            <a:r>
+              <a:rPr sz="1250" b="0">
+                <a:solidFill>
+                  <a:srgbClr val="71838F"/>
+                </a:solidFill>
+                <a:latin typeface="Calibri"/>
+              </a:rPr>
+              <a:t>Every alert says “why”; tiering and every change are fully logged — stands up to regulators.</a:t>
+            </a:r>
+          </a:p>
+        </p:txBody>
+      </p:sp>
+      <p:sp>
+        <p:nvSpPr>
+          <p:cNvPr id="18" name="Rounded Rectangle 17"/>
+          <p:cNvSpPr/>
+          <p:nvPr/>
+        </p:nvSpPr>
+        <p:spPr>
+          <a:xfrm>
+            <a:off x="6291072" y="4297680"/>
+            <a:ext cx="5358384" cy="1783080"/>
+          </a:xfrm>
+          <a:prstGeom prst="roundRect">
+            <a:avLst>
+              <a:gd name="adj" fmla="val 10000"/>
+            </a:avLst>
+          </a:prstGeom>
+          <a:solidFill>
+            <a:srgbClr val="F4FAFB"/>
+          </a:solidFill>
+          <a:ln w="12700">
+            <a:solidFill>
+              <a:srgbClr val="DCE8EE"/>
+            </a:solidFill>
+          </a:ln>
+          <a:effectLst/>
+        </p:spPr>
+        <p:style>
+          <a:lnRef idx="1">
+            <a:schemeClr val="accent1"/>
+          </a:lnRef>
+          <a:fillRef idx="3">
+            <a:schemeClr val="accent1"/>
+          </a:fillRef>
+          <a:effectRef idx="2">
+            <a:schemeClr val="accent1"/>
+          </a:effectRef>
+          <a:fontRef idx="minor">
+            <a:schemeClr val="lt1"/>
+          </a:fontRef>
+        </p:style>
+        <p:txBody>
+          <a:bodyPr rtlCol="0" anchor="ctr"/>
+          <a:lstStyle/>
+          <a:p>
+            <a:pPr algn="ctr"/>
+          </a:p>
+        </p:txBody>
+      </p:sp>
+      <p:sp>
+        <p:nvSpPr>
+          <p:cNvPr id="19" name="Rounded Rectangle 18"/>
+          <p:cNvSpPr/>
+          <p:nvPr/>
+        </p:nvSpPr>
+        <p:spPr>
+          <a:xfrm>
+            <a:off x="6565392" y="4590288"/>
+            <a:ext cx="566928" cy="566928"/>
+          </a:xfrm>
+          <a:prstGeom prst="roundRect">
+            <a:avLst>
+              <a:gd name="adj" fmla="val 25000"/>
+            </a:avLst>
+          </a:prstGeom>
+          <a:solidFill>
+            <a:srgbClr val="1BA39C"/>
+          </a:solidFill>
+          <a:ln>
+            <a:noFill/>
+          </a:ln>
+          <a:effectLst/>
+        </p:spPr>
+        <p:style>
+          <a:lnRef idx="1">
+            <a:schemeClr val="accent1"/>
+          </a:lnRef>
+          <a:fillRef idx="3">
+            <a:schemeClr val="accent1"/>
+          </a:fillRef>
+          <a:effectRef idx="2">
+            <a:schemeClr val="accent1"/>
+          </a:effectRef>
+          <a:fontRef idx="minor">
+            <a:schemeClr val="lt1"/>
+          </a:fontRef>
+        </p:style>
+        <p:txBody>
+          <a:bodyPr rtlCol="0" anchor="ctr" wrap="none"/>
+          <a:lstStyle/>
+          <a:p>
+            <a:pPr algn="ctr"/>
+            <a:r>
+              <a:rPr sz="2000" b="1">
+                <a:solidFill>
+                  <a:srgbClr val="FFFFFF"/>
+                </a:solidFill>
+                <a:latin typeface="Calibri"/>
+              </a:rPr>
+              <a:t>4</a:t>
+            </a:r>
+          </a:p>
+        </p:txBody>
+      </p:sp>
+      <p:sp>
+        <p:nvSpPr>
+          <p:cNvPr id="20" name="TextBox 19"/>
+          <p:cNvSpPr txBox="1"/>
+          <p:nvPr/>
+        </p:nvSpPr>
+        <p:spPr>
+          <a:xfrm>
+            <a:off x="7315200" y="4572000"/>
+            <a:ext cx="4078224" cy="457200"/>
+          </a:xfrm>
+          <a:prstGeom prst="rect">
+            <a:avLst/>
+          </a:prstGeom>
+          <a:noFill/>
+        </p:spPr>
+        <p:txBody>
+          <a:bodyPr wrap="square" anchor="ctr" lIns="36576" rIns="36576" tIns="18288" bIns="18288">
+            <a:spAutoFit/>
+          </a:bodyPr>
+          <a:lstStyle/>
+          <a:p>
+            <a:pPr algn="l">
+              <a:lnSpc>
+                <a:spcPct val="105000"/>
+              </a:lnSpc>
+            </a:pPr>
+            <a:r>
+              <a:rPr sz="1650" b="1">
+                <a:solidFill>
+                  <a:srgbClr val="17313F"/>
+                </a:solidFill>
+                <a:latin typeface="Calibri"/>
+              </a:rPr>
+              <a:t>Sharper &amp; faster</a:t>
+            </a:r>
+          </a:p>
+        </p:txBody>
+      </p:sp>
+      <p:sp>
+        <p:nvSpPr>
+          <p:cNvPr id="21" name="TextBox 20"/>
+          <p:cNvSpPr txBox="1"/>
+          <p:nvPr/>
+        </p:nvSpPr>
+        <p:spPr>
+          <a:xfrm>
+            <a:off x="6601968" y="5230368"/>
+            <a:ext cx="4764024" cy="731520"/>
+          </a:xfrm>
+          <a:prstGeom prst="rect">
+            <a:avLst/>
+          </a:prstGeom>
+          <a:noFill/>
+        </p:spPr>
+        <p:txBody>
+          <a:bodyPr wrap="square" anchor="t" lIns="36576" rIns="36576" tIns="18288" bIns="18288">
+            <a:spAutoFit/>
+          </a:bodyPr>
+          <a:lstStyle/>
+          <a:p>
+            <a:pPr algn="l">
+              <a:lnSpc>
+                <a:spcPct val="118000"/>
+              </a:lnSpc>
+            </a:pPr>
+            <a:r>
+              <a:rPr sz="1250" b="0">
+                <a:solidFill>
+                  <a:srgbClr val="71838F"/>
+                </a:solidFill>
+                <a:latin typeface="Calibri"/>
+              </a:rPr>
+              <a:t>AI speeds up evidence-gathering; every review feeds back and keeps improving detection.</a:t>
+            </a:r>
+          </a:p>
+        </p:txBody>
+      </p:sp>
+    </p:spTree>
+  </p:cSld>
+  <p:clrMapOvr>
+    <a:masterClrMapping/>
+  </p:clrMapOvr>
+</p:sld>
+</file>
+
+<file path=ppt/slides/slide3.xml><?xml version="1.0" encoding="utf-8"?>
 <p:sld xmlns:a="http://schemas.openxmlformats.org/drawingml/2006/main" xmlns:r="http://schemas.openxmlformats.org/officeDocument/2006/relationships" xmlns:p="http://schemas.openxmlformats.org/presentationml/2006/main">
   <p:cSld name="Slide 2">
     <p:bg>
@@ -2372,7 +4547,7 @@
 </p:sld>
 </file>
 
-<file path=ppt/slides/slide3.xml><?xml version="1.0" encoding="utf-8"?>
+<file path=ppt/slides/slide4.xml><?xml version="1.0" encoding="utf-8"?>
 <p:sld xmlns:a="http://schemas.openxmlformats.org/drawingml/2006/main" xmlns:r="http://schemas.openxmlformats.org/officeDocument/2006/relationships" xmlns:p="http://schemas.openxmlformats.org/presentationml/2006/main">
   <p:cSld name="Slide 3">
     <p:bg>
@@ -3282,7 +5457,7 @@
 </p:sld>
 </file>
 
-<file path=ppt/slides/slide4.xml><?xml version="1.0" encoding="utf-8"?>
+<file path=ppt/slides/slide5.xml><?xml version="1.0" encoding="utf-8"?>
 <p:sld xmlns:a="http://schemas.openxmlformats.org/drawingml/2006/main" xmlns:r="http://schemas.openxmlformats.org/officeDocument/2006/relationships" xmlns:p="http://schemas.openxmlformats.org/presentationml/2006/main">
   <p:cSld name="Slide 4">
     <p:bg>
@@ -4587,7 +6762,7 @@
 </p:sld>
 </file>
 
-<file path=ppt/slides/slide5.xml><?xml version="1.0" encoding="utf-8"?>
+<file path=ppt/slides/slide6.xml><?xml version="1.0" encoding="utf-8"?>
 <p:sld xmlns:a="http://schemas.openxmlformats.org/drawingml/2006/main" xmlns:r="http://schemas.openxmlformats.org/officeDocument/2006/relationships" xmlns:p="http://schemas.openxmlformats.org/presentationml/2006/main">
   <p:cSld name="Slide 5">
     <p:bg>
@@ -5900,7 +8075,7 @@
 </p:sld>
 </file>
 
-<file path=ppt/slides/slide6.xml><?xml version="1.0" encoding="utf-8"?>
+<file path=ppt/slides/slide7.xml><?xml version="1.0" encoding="utf-8"?>
 <p:sld xmlns:a="http://schemas.openxmlformats.org/drawingml/2006/main" xmlns:r="http://schemas.openxmlformats.org/officeDocument/2006/relationships" xmlns:p="http://schemas.openxmlformats.org/presentationml/2006/main">
   <p:cSld name="Slide 6">
     <p:bg>
@@ -7629,7 +9804,7 @@
 </p:sld>
 </file>
 
-<file path=ppt/slides/slide7.xml><?xml version="1.0" encoding="utf-8"?>
+<file path=ppt/slides/slide8.xml><?xml version="1.0" encoding="utf-8"?>
 <p:sld xmlns:a="http://schemas.openxmlformats.org/drawingml/2006/main" xmlns:r="http://schemas.openxmlformats.org/officeDocument/2006/relationships" xmlns:p="http://schemas.openxmlformats.org/presentationml/2006/main">
   <p:cSld name="Slide 8">
     <p:bg>
@@ -8736,7 +10911,7 @@
 </p:sld>
 </file>
 
-<file path=ppt/slides/slide8.xml><?xml version="1.0" encoding="utf-8"?>
+<file path=ppt/slides/slide9.xml><?xml version="1.0" encoding="utf-8"?>
 <p:sld xmlns:a="http://schemas.openxmlformats.org/drawingml/2006/main" xmlns:r="http://schemas.openxmlformats.org/officeDocument/2006/relationships" xmlns:p="http://schemas.openxmlformats.org/presentationml/2006/main">
   <p:cSld name="Slide 9">
     <p:bg>
@@ -9321,917 +11496,6 @@
               <a:t>Prototype demo · company payment data is synthetic; external data sources / Hermes framework / payment hold are pending integration.</a:t>
             </a:r>
             <a:endParaRPr lang="en-US" sz="1000" dirty="0"/>
-          </a:p>
-        </p:txBody>
-      </p:sp>
-    </p:spTree>
-  </p:cSld>
-  <p:clrMapOvr>
-    <a:masterClrMapping/>
-  </p:clrMapOvr>
-</p:sld>
-</file>
-
-<file path=ppt/slides/slide9.xml><?xml version="1.0" encoding="utf-8"?>
-<p:sld xmlns:a="http://schemas.openxmlformats.org/drawingml/2006/main" xmlns:p="http://schemas.openxmlformats.org/presentationml/2006/main" xmlns:r="http://schemas.openxmlformats.org/officeDocument/2006/relationships">
-  <p:cSld>
-    <p:bg>
-      <p:bgPr>
-        <a:solidFill>
-          <a:srgbClr val="FFFFFF"/>
-        </a:solidFill>
-        <a:effectLst/>
-      </p:bgPr>
-    </p:bg>
-    <p:spTree>
-      <p:nvGrpSpPr>
-        <p:cNvPr id="1" name=""/>
-        <p:cNvGrpSpPr/>
-        <p:nvPr/>
-      </p:nvGrpSpPr>
-      <p:grpSpPr/>
-      <p:sp>
-        <p:nvSpPr>
-          <p:cNvPr id="2" name="Rectangle 1"/>
-          <p:cNvSpPr/>
-          <p:nvPr/>
-        </p:nvSpPr>
-        <p:spPr>
-          <a:xfrm>
-            <a:off x="0" y="0"/>
-            <a:ext cx="256032" cy="6858000"/>
-          </a:xfrm>
-          <a:prstGeom prst="rect">
-            <a:avLst/>
-          </a:prstGeom>
-          <a:solidFill>
-            <a:srgbClr val="1BA39C"/>
-          </a:solidFill>
-          <a:ln>
-            <a:noFill/>
-          </a:ln>
-          <a:effectLst/>
-        </p:spPr>
-        <p:style>
-          <a:lnRef idx="1">
-            <a:schemeClr val="accent1"/>
-          </a:lnRef>
-          <a:fillRef idx="3">
-            <a:schemeClr val="accent1"/>
-          </a:fillRef>
-          <a:effectRef idx="2">
-            <a:schemeClr val="accent1"/>
-          </a:effectRef>
-          <a:fontRef idx="minor">
-            <a:schemeClr val="lt1"/>
-          </a:fontRef>
-        </p:style>
-        <p:txBody>
-          <a:bodyPr rtlCol="0" anchor="ctr"/>
-          <a:lstStyle/>
-          <a:p>
-            <a:pPr algn="ctr"/>
-          </a:p>
-        </p:txBody>
-      </p:sp>
-      <p:sp>
-        <p:nvSpPr>
-          <p:cNvPr id="3" name="TextBox 2"/>
-          <p:cNvSpPr txBox="1"/>
-          <p:nvPr/>
-        </p:nvSpPr>
-        <p:spPr>
-          <a:xfrm>
-            <a:off x="548640" y="457200"/>
-            <a:ext cx="9144000" cy="274320"/>
-          </a:xfrm>
-          <a:prstGeom prst="rect">
-            <a:avLst/>
-          </a:prstGeom>
-          <a:noFill/>
-        </p:spPr>
-        <p:txBody>
-          <a:bodyPr wrap="square" anchor="t" lIns="36576" rIns="36576" tIns="18288" bIns="18288">
-            <a:spAutoFit/>
-          </a:bodyPr>
-          <a:lstStyle/>
-          <a:p>
-            <a:pPr algn="l">
-              <a:lnSpc>
-                <a:spcPct val="105000"/>
-              </a:lnSpc>
-            </a:pPr>
-            <a:r>
-              <a:rPr sz="1200" b="1">
-                <a:solidFill>
-                  <a:srgbClr val="1BA39C"/>
-                </a:solidFill>
-                <a:latin typeface="Calibri"/>
-              </a:rPr>
-              <a:t>GOALS &amp; BENEFITS</a:t>
-            </a:r>
-          </a:p>
-        </p:txBody>
-      </p:sp>
-      <p:sp>
-        <p:nvSpPr>
-          <p:cNvPr id="4" name="TextBox 3"/>
-          <p:cNvSpPr txBox="1"/>
-          <p:nvPr/>
-        </p:nvSpPr>
-        <p:spPr>
-          <a:xfrm>
-            <a:off x="548640" y="749808"/>
-            <a:ext cx="11064240" cy="822960"/>
-          </a:xfrm>
-          <a:prstGeom prst="rect">
-            <a:avLst/>
-          </a:prstGeom>
-          <a:noFill/>
-        </p:spPr>
-        <p:txBody>
-          <a:bodyPr wrap="square" anchor="t" lIns="36576" rIns="36576" tIns="18288" bIns="18288">
-            <a:spAutoFit/>
-          </a:bodyPr>
-          <a:lstStyle/>
-          <a:p>
-            <a:pPr algn="l">
-              <a:lnSpc>
-                <a:spcPct val="105000"/>
-              </a:lnSpc>
-            </a:pPr>
-            <a:r>
-              <a:rPr sz="3000" b="1">
-                <a:solidFill>
-                  <a:srgbClr val="17313F"/>
-                </a:solidFill>
-                <a:latin typeface="Calibri"/>
-              </a:rPr>
-              <a:t>Help Legal catch potential laundering early</a:t>
-            </a:r>
-          </a:p>
-        </p:txBody>
-      </p:sp>
-      <p:sp>
-        <p:nvSpPr>
-          <p:cNvPr id="5" name="TextBox 4"/>
-          <p:cNvSpPr txBox="1"/>
-          <p:nvPr/>
-        </p:nvSpPr>
-        <p:spPr>
-          <a:xfrm>
-            <a:off x="566928" y="1627632"/>
-            <a:ext cx="10972800" cy="548640"/>
-          </a:xfrm>
-          <a:prstGeom prst="rect">
-            <a:avLst/>
-          </a:prstGeom>
-          <a:noFill/>
-        </p:spPr>
-        <p:txBody>
-          <a:bodyPr wrap="square" anchor="t" lIns="36576" rIns="36576" tIns="18288" bIns="18288">
-            <a:spAutoFit/>
-          </a:bodyPr>
-          <a:lstStyle/>
-          <a:p>
-            <a:pPr algn="l">
-              <a:lnSpc>
-                <a:spcPct val="115000"/>
-              </a:lnSpc>
-            </a:pPr>
-            <a:r>
-              <a:rPr sz="1400" b="0">
-                <a:solidFill>
-                  <a:srgbClr val="71838F"/>
-                </a:solidFill>
-                <a:latin typeface="Calibri"/>
-              </a:rPr>
-              <a:t>Shift from after-the-fact investigation to up-front detection — stop risk before the payment goes out.</a:t>
-            </a:r>
-          </a:p>
-        </p:txBody>
-      </p:sp>
-      <p:sp>
-        <p:nvSpPr>
-          <p:cNvPr id="6" name="Rounded Rectangle 5"/>
-          <p:cNvSpPr/>
-          <p:nvPr/>
-        </p:nvSpPr>
-        <p:spPr>
-          <a:xfrm>
-            <a:off x="548640" y="2377440"/>
-            <a:ext cx="5358384" cy="1783080"/>
-          </a:xfrm>
-          <a:prstGeom prst="roundRect">
-            <a:avLst>
-              <a:gd name="adj" fmla="val 10000"/>
-            </a:avLst>
-          </a:prstGeom>
-          <a:solidFill>
-            <a:srgbClr val="F4FAFB"/>
-          </a:solidFill>
-          <a:ln w="12700">
-            <a:solidFill>
-              <a:srgbClr val="DCE8EE"/>
-            </a:solidFill>
-          </a:ln>
-          <a:effectLst/>
-        </p:spPr>
-        <p:style>
-          <a:lnRef idx="1">
-            <a:schemeClr val="accent1"/>
-          </a:lnRef>
-          <a:fillRef idx="3">
-            <a:schemeClr val="accent1"/>
-          </a:fillRef>
-          <a:effectRef idx="2">
-            <a:schemeClr val="accent1"/>
-          </a:effectRef>
-          <a:fontRef idx="minor">
-            <a:schemeClr val="lt1"/>
-          </a:fontRef>
-        </p:style>
-        <p:txBody>
-          <a:bodyPr rtlCol="0" anchor="ctr"/>
-          <a:lstStyle/>
-          <a:p>
-            <a:pPr algn="ctr"/>
-          </a:p>
-        </p:txBody>
-      </p:sp>
-      <p:sp>
-        <p:nvSpPr>
-          <p:cNvPr id="7" name="Rounded Rectangle 6"/>
-          <p:cNvSpPr/>
-          <p:nvPr/>
-        </p:nvSpPr>
-        <p:spPr>
-          <a:xfrm>
-            <a:off x="822959" y="2670048"/>
-            <a:ext cx="566928" cy="566928"/>
-          </a:xfrm>
-          <a:prstGeom prst="roundRect">
-            <a:avLst>
-              <a:gd name="adj" fmla="val 25000"/>
-            </a:avLst>
-          </a:prstGeom>
-          <a:solidFill>
-            <a:srgbClr val="1BA39C"/>
-          </a:solidFill>
-          <a:ln>
-            <a:noFill/>
-          </a:ln>
-          <a:effectLst/>
-        </p:spPr>
-        <p:style>
-          <a:lnRef idx="1">
-            <a:schemeClr val="accent1"/>
-          </a:lnRef>
-          <a:fillRef idx="3">
-            <a:schemeClr val="accent1"/>
-          </a:fillRef>
-          <a:effectRef idx="2">
-            <a:schemeClr val="accent1"/>
-          </a:effectRef>
-          <a:fontRef idx="minor">
-            <a:schemeClr val="lt1"/>
-          </a:fontRef>
-        </p:style>
-        <p:txBody>
-          <a:bodyPr rtlCol="0" anchor="ctr" wrap="none"/>
-          <a:lstStyle/>
-          <a:p>
-            <a:pPr algn="ctr"/>
-            <a:r>
-              <a:rPr sz="2000" b="1">
-                <a:solidFill>
-                  <a:srgbClr val="FFFFFF"/>
-                </a:solidFill>
-                <a:latin typeface="Calibri"/>
-              </a:rPr>
-              <a:t>1</a:t>
-            </a:r>
-          </a:p>
-        </p:txBody>
-      </p:sp>
-      <p:sp>
-        <p:nvSpPr>
-          <p:cNvPr id="8" name="TextBox 7"/>
-          <p:cNvSpPr txBox="1"/>
-          <p:nvPr/>
-        </p:nvSpPr>
-        <p:spPr>
-          <a:xfrm>
-            <a:off x="1572768" y="2651760"/>
-            <a:ext cx="4078224" cy="457200"/>
-          </a:xfrm>
-          <a:prstGeom prst="rect">
-            <a:avLst/>
-          </a:prstGeom>
-          <a:noFill/>
-        </p:spPr>
-        <p:txBody>
-          <a:bodyPr wrap="square" anchor="ctr" lIns="36576" rIns="36576" tIns="18288" bIns="18288">
-            <a:spAutoFit/>
-          </a:bodyPr>
-          <a:lstStyle/>
-          <a:p>
-            <a:pPr algn="l">
-              <a:lnSpc>
-                <a:spcPct val="105000"/>
-              </a:lnSpc>
-            </a:pPr>
-            <a:r>
-              <a:rPr sz="1650" b="1">
-                <a:solidFill>
-                  <a:srgbClr val="17313F"/>
-                </a:solidFill>
-                <a:latin typeface="Calibri"/>
-              </a:rPr>
-              <a:t>Proactive detection</a:t>
-            </a:r>
-          </a:p>
-        </p:txBody>
-      </p:sp>
-      <p:sp>
-        <p:nvSpPr>
-          <p:cNvPr id="9" name="TextBox 8"/>
-          <p:cNvSpPr txBox="1"/>
-          <p:nvPr/>
-        </p:nvSpPr>
-        <p:spPr>
-          <a:xfrm>
-            <a:off x="859536" y="3310128"/>
-            <a:ext cx="4764024" cy="731520"/>
-          </a:xfrm>
-          <a:prstGeom prst="rect">
-            <a:avLst/>
-          </a:prstGeom>
-          <a:noFill/>
-        </p:spPr>
-        <p:txBody>
-          <a:bodyPr wrap="square" anchor="t" lIns="36576" rIns="36576" tIns="18288" bIns="18288">
-            <a:spAutoFit/>
-          </a:bodyPr>
-          <a:lstStyle/>
-          <a:p>
-            <a:pPr algn="l">
-              <a:lnSpc>
-                <a:spcPct val="118000"/>
-              </a:lnSpc>
-            </a:pPr>
-            <a:r>
-              <a:rPr sz="1250" b="0">
-                <a:solidFill>
-                  <a:srgbClr val="71838F"/>
-                </a:solidFill>
-                <a:latin typeface="Calibri"/>
-              </a:rPr>
-              <a:t>Flag potential laundering while the payment is in flight — hold risk before payout, not audit it afterward.</a:t>
-            </a:r>
-          </a:p>
-        </p:txBody>
-      </p:sp>
-      <p:sp>
-        <p:nvSpPr>
-          <p:cNvPr id="10" name="Rounded Rectangle 9"/>
-          <p:cNvSpPr/>
-          <p:nvPr/>
-        </p:nvSpPr>
-        <p:spPr>
-          <a:xfrm>
-            <a:off x="6291072" y="2377440"/>
-            <a:ext cx="5358384" cy="1783080"/>
-          </a:xfrm>
-          <a:prstGeom prst="roundRect">
-            <a:avLst>
-              <a:gd name="adj" fmla="val 10000"/>
-            </a:avLst>
-          </a:prstGeom>
-          <a:solidFill>
-            <a:srgbClr val="F4FAFB"/>
-          </a:solidFill>
-          <a:ln w="12700">
-            <a:solidFill>
-              <a:srgbClr val="DCE8EE"/>
-            </a:solidFill>
-          </a:ln>
-          <a:effectLst/>
-        </p:spPr>
-        <p:style>
-          <a:lnRef idx="1">
-            <a:schemeClr val="accent1"/>
-          </a:lnRef>
-          <a:fillRef idx="3">
-            <a:schemeClr val="accent1"/>
-          </a:fillRef>
-          <a:effectRef idx="2">
-            <a:schemeClr val="accent1"/>
-          </a:effectRef>
-          <a:fontRef idx="minor">
-            <a:schemeClr val="lt1"/>
-          </a:fontRef>
-        </p:style>
-        <p:txBody>
-          <a:bodyPr rtlCol="0" anchor="ctr"/>
-          <a:lstStyle/>
-          <a:p>
-            <a:pPr algn="ctr"/>
-          </a:p>
-        </p:txBody>
-      </p:sp>
-      <p:sp>
-        <p:nvSpPr>
-          <p:cNvPr id="11" name="Rounded Rectangle 10"/>
-          <p:cNvSpPr/>
-          <p:nvPr/>
-        </p:nvSpPr>
-        <p:spPr>
-          <a:xfrm>
-            <a:off x="6565392" y="2670048"/>
-            <a:ext cx="566928" cy="566928"/>
-          </a:xfrm>
-          <a:prstGeom prst="roundRect">
-            <a:avLst>
-              <a:gd name="adj" fmla="val 25000"/>
-            </a:avLst>
-          </a:prstGeom>
-          <a:solidFill>
-            <a:srgbClr val="1BA39C"/>
-          </a:solidFill>
-          <a:ln>
-            <a:noFill/>
-          </a:ln>
-          <a:effectLst/>
-        </p:spPr>
-        <p:style>
-          <a:lnRef idx="1">
-            <a:schemeClr val="accent1"/>
-          </a:lnRef>
-          <a:fillRef idx="3">
-            <a:schemeClr val="accent1"/>
-          </a:fillRef>
-          <a:effectRef idx="2">
-            <a:schemeClr val="accent1"/>
-          </a:effectRef>
-          <a:fontRef idx="minor">
-            <a:schemeClr val="lt1"/>
-          </a:fontRef>
-        </p:style>
-        <p:txBody>
-          <a:bodyPr rtlCol="0" anchor="ctr" wrap="none"/>
-          <a:lstStyle/>
-          <a:p>
-            <a:pPr algn="ctr"/>
-            <a:r>
-              <a:rPr sz="2000" b="1">
-                <a:solidFill>
-                  <a:srgbClr val="FFFFFF"/>
-                </a:solidFill>
-                <a:latin typeface="Calibri"/>
-              </a:rPr>
-              <a:t>2</a:t>
-            </a:r>
-          </a:p>
-        </p:txBody>
-      </p:sp>
-      <p:sp>
-        <p:nvSpPr>
-          <p:cNvPr id="12" name="TextBox 11"/>
-          <p:cNvSpPr txBox="1"/>
-          <p:nvPr/>
-        </p:nvSpPr>
-        <p:spPr>
-          <a:xfrm>
-            <a:off x="7315200" y="2651760"/>
-            <a:ext cx="4078224" cy="457200"/>
-          </a:xfrm>
-          <a:prstGeom prst="rect">
-            <a:avLst/>
-          </a:prstGeom>
-          <a:noFill/>
-        </p:spPr>
-        <p:txBody>
-          <a:bodyPr wrap="square" anchor="ctr" lIns="36576" rIns="36576" tIns="18288" bIns="18288">
-            <a:spAutoFit/>
-          </a:bodyPr>
-          <a:lstStyle/>
-          <a:p>
-            <a:pPr algn="l">
-              <a:lnSpc>
-                <a:spcPct val="105000"/>
-              </a:lnSpc>
-            </a:pPr>
-            <a:r>
-              <a:rPr sz="1650" b="1">
-                <a:solidFill>
-                  <a:srgbClr val="17313F"/>
-                </a:solidFill>
-                <a:latin typeface="Calibri"/>
-              </a:rPr>
-              <a:t>Focus on high value</a:t>
-            </a:r>
-          </a:p>
-        </p:txBody>
-      </p:sp>
-      <p:sp>
-        <p:nvSpPr>
-          <p:cNvPr id="13" name="TextBox 12"/>
-          <p:cNvSpPr txBox="1"/>
-          <p:nvPr/>
-        </p:nvSpPr>
-        <p:spPr>
-          <a:xfrm>
-            <a:off x="6601968" y="3310128"/>
-            <a:ext cx="4764024" cy="731520"/>
-          </a:xfrm>
-          <a:prstGeom prst="rect">
-            <a:avLst/>
-          </a:prstGeom>
-          <a:noFill/>
-        </p:spPr>
-        <p:txBody>
-          <a:bodyPr wrap="square" anchor="t" lIns="36576" rIns="36576" tIns="18288" bIns="18288">
-            <a:spAutoFit/>
-          </a:bodyPr>
-          <a:lstStyle/>
-          <a:p>
-            <a:pPr algn="l">
-              <a:lnSpc>
-                <a:spcPct val="118000"/>
-              </a:lnSpc>
-            </a:pPr>
-            <a:r>
-              <a:rPr sz="1250" b="0">
-                <a:solidFill>
-                  <a:srgbClr val="71838F"/>
-                </a:solidFill>
-                <a:latin typeface="Calibri"/>
-              </a:rPr>
-              <a:t>Surface the most-worth-reviewing few; spend Legal's limited capacity where it counts.</a:t>
-            </a:r>
-          </a:p>
-        </p:txBody>
-      </p:sp>
-      <p:sp>
-        <p:nvSpPr>
-          <p:cNvPr id="14" name="Rounded Rectangle 13"/>
-          <p:cNvSpPr/>
-          <p:nvPr/>
-        </p:nvSpPr>
-        <p:spPr>
-          <a:xfrm>
-            <a:off x="548640" y="4297680"/>
-            <a:ext cx="5358384" cy="1783080"/>
-          </a:xfrm>
-          <a:prstGeom prst="roundRect">
-            <a:avLst>
-              <a:gd name="adj" fmla="val 10000"/>
-            </a:avLst>
-          </a:prstGeom>
-          <a:solidFill>
-            <a:srgbClr val="F4FAFB"/>
-          </a:solidFill>
-          <a:ln w="12700">
-            <a:solidFill>
-              <a:srgbClr val="DCE8EE"/>
-            </a:solidFill>
-          </a:ln>
-          <a:effectLst/>
-        </p:spPr>
-        <p:style>
-          <a:lnRef idx="1">
-            <a:schemeClr val="accent1"/>
-          </a:lnRef>
-          <a:fillRef idx="3">
-            <a:schemeClr val="accent1"/>
-          </a:fillRef>
-          <a:effectRef idx="2">
-            <a:schemeClr val="accent1"/>
-          </a:effectRef>
-          <a:fontRef idx="minor">
-            <a:schemeClr val="lt1"/>
-          </a:fontRef>
-        </p:style>
-        <p:txBody>
-          <a:bodyPr rtlCol="0" anchor="ctr"/>
-          <a:lstStyle/>
-          <a:p>
-            <a:pPr algn="ctr"/>
-          </a:p>
-        </p:txBody>
-      </p:sp>
-      <p:sp>
-        <p:nvSpPr>
-          <p:cNvPr id="15" name="Rounded Rectangle 14"/>
-          <p:cNvSpPr/>
-          <p:nvPr/>
-        </p:nvSpPr>
-        <p:spPr>
-          <a:xfrm>
-            <a:off x="822959" y="4590288"/>
-            <a:ext cx="566928" cy="566928"/>
-          </a:xfrm>
-          <a:prstGeom prst="roundRect">
-            <a:avLst>
-              <a:gd name="adj" fmla="val 25000"/>
-            </a:avLst>
-          </a:prstGeom>
-          <a:solidFill>
-            <a:srgbClr val="1BA39C"/>
-          </a:solidFill>
-          <a:ln>
-            <a:noFill/>
-          </a:ln>
-          <a:effectLst/>
-        </p:spPr>
-        <p:style>
-          <a:lnRef idx="1">
-            <a:schemeClr val="accent1"/>
-          </a:lnRef>
-          <a:fillRef idx="3">
-            <a:schemeClr val="accent1"/>
-          </a:fillRef>
-          <a:effectRef idx="2">
-            <a:schemeClr val="accent1"/>
-          </a:effectRef>
-          <a:fontRef idx="minor">
-            <a:schemeClr val="lt1"/>
-          </a:fontRef>
-        </p:style>
-        <p:txBody>
-          <a:bodyPr rtlCol="0" anchor="ctr" wrap="none"/>
-          <a:lstStyle/>
-          <a:p>
-            <a:pPr algn="ctr"/>
-            <a:r>
-              <a:rPr sz="2000" b="1">
-                <a:solidFill>
-                  <a:srgbClr val="FFFFFF"/>
-                </a:solidFill>
-                <a:latin typeface="Calibri"/>
-              </a:rPr>
-              <a:t>3</a:t>
-            </a:r>
-          </a:p>
-        </p:txBody>
-      </p:sp>
-      <p:sp>
-        <p:nvSpPr>
-          <p:cNvPr id="16" name="TextBox 15"/>
-          <p:cNvSpPr txBox="1"/>
-          <p:nvPr/>
-        </p:nvSpPr>
-        <p:spPr>
-          <a:xfrm>
-            <a:off x="1572768" y="4572000"/>
-            <a:ext cx="4078224" cy="457200"/>
-          </a:xfrm>
-          <a:prstGeom prst="rect">
-            <a:avLst/>
-          </a:prstGeom>
-          <a:noFill/>
-        </p:spPr>
-        <p:txBody>
-          <a:bodyPr wrap="square" anchor="ctr" lIns="36576" rIns="36576" tIns="18288" bIns="18288">
-            <a:spAutoFit/>
-          </a:bodyPr>
-          <a:lstStyle/>
-          <a:p>
-            <a:pPr algn="l">
-              <a:lnSpc>
-                <a:spcPct val="105000"/>
-              </a:lnSpc>
-            </a:pPr>
-            <a:r>
-              <a:rPr sz="1650" b="1">
-                <a:solidFill>
-                  <a:srgbClr val="17313F"/>
-                </a:solidFill>
-                <a:latin typeface="Calibri"/>
-              </a:rPr>
-              <a:t>Explainable &amp; auditable</a:t>
-            </a:r>
-          </a:p>
-        </p:txBody>
-      </p:sp>
-      <p:sp>
-        <p:nvSpPr>
-          <p:cNvPr id="17" name="TextBox 16"/>
-          <p:cNvSpPr txBox="1"/>
-          <p:nvPr/>
-        </p:nvSpPr>
-        <p:spPr>
-          <a:xfrm>
-            <a:off x="859536" y="5230368"/>
-            <a:ext cx="4764024" cy="731520"/>
-          </a:xfrm>
-          <a:prstGeom prst="rect">
-            <a:avLst/>
-          </a:prstGeom>
-          <a:noFill/>
-        </p:spPr>
-        <p:txBody>
-          <a:bodyPr wrap="square" anchor="t" lIns="36576" rIns="36576" tIns="18288" bIns="18288">
-            <a:spAutoFit/>
-          </a:bodyPr>
-          <a:lstStyle/>
-          <a:p>
-            <a:pPr algn="l">
-              <a:lnSpc>
-                <a:spcPct val="118000"/>
-              </a:lnSpc>
-            </a:pPr>
-            <a:r>
-              <a:rPr sz="1250" b="0">
-                <a:solidFill>
-                  <a:srgbClr val="71838F"/>
-                </a:solidFill>
-                <a:latin typeface="Calibri"/>
-              </a:rPr>
-              <a:t>Every alert says “why”; tiering and every change are fully logged — stands up to regulators.</a:t>
-            </a:r>
-          </a:p>
-        </p:txBody>
-      </p:sp>
-      <p:sp>
-        <p:nvSpPr>
-          <p:cNvPr id="18" name="Rounded Rectangle 17"/>
-          <p:cNvSpPr/>
-          <p:nvPr/>
-        </p:nvSpPr>
-        <p:spPr>
-          <a:xfrm>
-            <a:off x="6291072" y="4297680"/>
-            <a:ext cx="5358384" cy="1783080"/>
-          </a:xfrm>
-          <a:prstGeom prst="roundRect">
-            <a:avLst>
-              <a:gd name="adj" fmla="val 10000"/>
-            </a:avLst>
-          </a:prstGeom>
-          <a:solidFill>
-            <a:srgbClr val="F4FAFB"/>
-          </a:solidFill>
-          <a:ln w="12700">
-            <a:solidFill>
-              <a:srgbClr val="DCE8EE"/>
-            </a:solidFill>
-          </a:ln>
-          <a:effectLst/>
-        </p:spPr>
-        <p:style>
-          <a:lnRef idx="1">
-            <a:schemeClr val="accent1"/>
-          </a:lnRef>
-          <a:fillRef idx="3">
-            <a:schemeClr val="accent1"/>
-          </a:fillRef>
-          <a:effectRef idx="2">
-            <a:schemeClr val="accent1"/>
-          </a:effectRef>
-          <a:fontRef idx="minor">
-            <a:schemeClr val="lt1"/>
-          </a:fontRef>
-        </p:style>
-        <p:txBody>
-          <a:bodyPr rtlCol="0" anchor="ctr"/>
-          <a:lstStyle/>
-          <a:p>
-            <a:pPr algn="ctr"/>
-          </a:p>
-        </p:txBody>
-      </p:sp>
-      <p:sp>
-        <p:nvSpPr>
-          <p:cNvPr id="19" name="Rounded Rectangle 18"/>
-          <p:cNvSpPr/>
-          <p:nvPr/>
-        </p:nvSpPr>
-        <p:spPr>
-          <a:xfrm>
-            <a:off x="6565392" y="4590288"/>
-            <a:ext cx="566928" cy="566928"/>
-          </a:xfrm>
-          <a:prstGeom prst="roundRect">
-            <a:avLst>
-              <a:gd name="adj" fmla="val 25000"/>
-            </a:avLst>
-          </a:prstGeom>
-          <a:solidFill>
-            <a:srgbClr val="1BA39C"/>
-          </a:solidFill>
-          <a:ln>
-            <a:noFill/>
-          </a:ln>
-          <a:effectLst/>
-        </p:spPr>
-        <p:style>
-          <a:lnRef idx="1">
-            <a:schemeClr val="accent1"/>
-          </a:lnRef>
-          <a:fillRef idx="3">
-            <a:schemeClr val="accent1"/>
-          </a:fillRef>
-          <a:effectRef idx="2">
-            <a:schemeClr val="accent1"/>
-          </a:effectRef>
-          <a:fontRef idx="minor">
-            <a:schemeClr val="lt1"/>
-          </a:fontRef>
-        </p:style>
-        <p:txBody>
-          <a:bodyPr rtlCol="0" anchor="ctr" wrap="none"/>
-          <a:lstStyle/>
-          <a:p>
-            <a:pPr algn="ctr"/>
-            <a:r>
-              <a:rPr sz="2000" b="1">
-                <a:solidFill>
-                  <a:srgbClr val="FFFFFF"/>
-                </a:solidFill>
-                <a:latin typeface="Calibri"/>
-              </a:rPr>
-              <a:t>4</a:t>
-            </a:r>
-          </a:p>
-        </p:txBody>
-      </p:sp>
-      <p:sp>
-        <p:nvSpPr>
-          <p:cNvPr id="20" name="TextBox 19"/>
-          <p:cNvSpPr txBox="1"/>
-          <p:nvPr/>
-        </p:nvSpPr>
-        <p:spPr>
-          <a:xfrm>
-            <a:off x="7315200" y="4572000"/>
-            <a:ext cx="4078224" cy="457200"/>
-          </a:xfrm>
-          <a:prstGeom prst="rect">
-            <a:avLst/>
-          </a:prstGeom>
-          <a:noFill/>
-        </p:spPr>
-        <p:txBody>
-          <a:bodyPr wrap="square" anchor="ctr" lIns="36576" rIns="36576" tIns="18288" bIns="18288">
-            <a:spAutoFit/>
-          </a:bodyPr>
-          <a:lstStyle/>
-          <a:p>
-            <a:pPr algn="l">
-              <a:lnSpc>
-                <a:spcPct val="105000"/>
-              </a:lnSpc>
-            </a:pPr>
-            <a:r>
-              <a:rPr sz="1650" b="1">
-                <a:solidFill>
-                  <a:srgbClr val="17313F"/>
-                </a:solidFill>
-                <a:latin typeface="Calibri"/>
-              </a:rPr>
-              <a:t>Sharper &amp; faster</a:t>
-            </a:r>
-          </a:p>
-        </p:txBody>
-      </p:sp>
-      <p:sp>
-        <p:nvSpPr>
-          <p:cNvPr id="21" name="TextBox 20"/>
-          <p:cNvSpPr txBox="1"/>
-          <p:nvPr/>
-        </p:nvSpPr>
-        <p:spPr>
-          <a:xfrm>
-            <a:off x="6601968" y="5230368"/>
-            <a:ext cx="4764024" cy="731520"/>
-          </a:xfrm>
-          <a:prstGeom prst="rect">
-            <a:avLst/>
-          </a:prstGeom>
-          <a:noFill/>
-        </p:spPr>
-        <p:txBody>
-          <a:bodyPr wrap="square" anchor="t" lIns="36576" rIns="36576" tIns="18288" bIns="18288">
-            <a:spAutoFit/>
-          </a:bodyPr>
-          <a:lstStyle/>
-          <a:p>
-            <a:pPr algn="l">
-              <a:lnSpc>
-                <a:spcPct val="118000"/>
-              </a:lnSpc>
-            </a:pPr>
-            <a:r>
-              <a:rPr sz="1250" b="0">
-                <a:solidFill>
-                  <a:srgbClr val="71838F"/>
-                </a:solidFill>
-                <a:latin typeface="Calibri"/>
-              </a:rPr>
-              <a:t>AI speeds up evidence-gathering; every review feeds back and keeps improving detection.</a:t>
-            </a:r>
           </a:p>
         </p:txBody>
       </p:sp>
